--- a/vietnam-distributor-pitch.pptx
+++ b/vietnam-distributor-pitch.pptx
@@ -142,7 +142,7 @@
                 </a:solidFill>
                 <a:latin typeface="+mn-lt"/>
               </a:rPr>
-              <a:t>2025: Mall = 2% of shops, 33% of GMV</a:t>
+              <a:t>Online supplement sales, Jan to May 2025</a:t>
             </a:r>
           </a:p>
         </c:rich>
@@ -166,7 +166,7 @@
               <c:strCache>
                 <c:ptCount val="1"/>
                 <c:pt idx="0">
-                  <c:v>Share of online supplement GMV</c:v>
+                  <c:v>Share of online supplement sales</c:v>
                 </c:pt>
               </c:strCache>
             </c:strRef>
@@ -231,7 +231,7 @@
                 <c:ptCount val="2"/>
                 <c:lvl>
                   <c:pt idx="0">
-                    <c:v>Official Mall stores</c:v>
+                    <c:v>Official stores</c:v>
                   </c:pt>
                   <c:pt idx="1">
                     <c:v>Unverified sellers</c:v>
@@ -247,10 +247,10 @@
                 <c:formatCode>General</c:formatCode>
                 <c:ptCount val="2"/>
                 <c:pt idx="0">
-                  <c:v>0.326</c:v>
+                  <c:v>0.262</c:v>
                 </c:pt>
                 <c:pt idx="1">
-                  <c:v>0.674</c:v>
+                  <c:v>0.738</c:v>
                 </c:pt>
               </c:numCache>
             </c:numRef>
@@ -331,287 +331,7 @@
         <c:axId val="2094734552"/>
         <c:scaling>
           <c:orientation val="minMax"/>
-          <c:max val="0.8"/>
-        </c:scaling>
-        <c:delete val="1"/>
-        <c:axPos val="l"/>
-        <c:numFmt formatCode="General" sourceLinked="0"/>
-        <c:majorTickMark val="out"/>
-        <c:minorTickMark val="none"/>
-        <c:tickLblPos val="nextTo"/>
-        <c:spPr>
-          <a:ln w="12700" cap="flat">
-            <a:solidFill>
-              <a:srgbClr val="888888"/>
-            </a:solidFill>
-            <a:prstDash val="solid"/>
-            <a:round/>
-          </a:ln>
-        </c:spPr>
-        <c:txPr>
-          <a:bodyPr/>
-          <a:lstStyle/>
-          <a:p>
-            <a:pPr>
-              <a:defRPr sz="1200" b="0" i="0" u="none" strike="noStrike">
-                <a:solidFill>
-                  <a:srgbClr val="000000"/>
-                </a:solidFill>
-                <a:latin typeface="Arial"/>
-              </a:defRPr>
-            </a:pPr>
-            <a:endParaRPr lang="en-US"/>
-          </a:p>
-        </c:txPr>
-        <c:crossAx val="2094734554"/>
-        <c:crosses val="autoZero"/>
-        <c:crossBetween val="between"/>
-      </c:valAx>
-      <c:spPr>
-        <a:noFill/>
-        <a:ln>
-          <a:noFill/>
-        </a:ln>
-        <a:effectLst/>
-      </c:spPr>
-    </c:plotArea>
-    <c:plotVisOnly val="1"/>
-    <c:dispBlanksAs val="span"/>
-  </c:chart>
-  <c:spPr>
-    <a:noFill/>
-    <a:ln>
-      <a:noFill/>
-    </a:ln>
-    <a:effectLst/>
-  </c:spPr>
-  <c:externalData r:id="rId1">
-    <c:autoUpdate val="0"/>
-  </c:externalData>
-</c:chartSpace>
-</file>
-
-<file path=ppt/charts/chart2.xml><?xml version="1.0" encoding="utf-8"?>
-<c:chartSpace xmlns:c="http://schemas.openxmlformats.org/drawingml/2006/chart" xmlns:a="http://schemas.openxmlformats.org/drawingml/2006/main" xmlns:r="http://schemas.openxmlformats.org/officeDocument/2006/relationships">
-  <c:date1904 val="0"/>
-  <c:roundedCorners val="1"/>
-  <c:chart>
-    <c:autoTitleDeleted val="1"/>
-    <c:plotArea>
-      <c:layout/>
-      <c:barChart>
-        <c:barDir val="col"/>
-        <c:grouping val="clustered"/>
-        <c:varyColors val="0"/>
-        <c:ser>
-          <c:idx val="0"/>
-          <c:order val="0"/>
-          <c:tx>
-            <c:strRef>
-              <c:f>Sheet1!$B$1</c:f>
-              <c:strCache>
-                <c:ptCount val="1"/>
-                <c:pt idx="0">
-                  <c:v>VND per unit</c:v>
-                </c:pt>
-              </c:strCache>
-            </c:strRef>
-          </c:tx>
-          <c:spPr>
-            <a:solidFill>
-              <a:srgbClr val="97BC62"/>
-            </a:solidFill>
-            <a:effectLst/>
-          </c:spPr>
-          <c:invertIfNegative val="0"/>
-          <c:dLbls>
-            <c:numFmt formatCode="#,##0" sourceLinked="0"/>
-            <c:txPr>
-              <a:bodyPr/>
-              <a:lstStyle/>
-              <a:p>
-                <a:pPr>
-                  <a:defRPr b="0" i="0" strike="noStrike" sz="1100" u="none">
-                    <a:solidFill>
-                      <a:srgbClr val="1A1C1A"/>
-                    </a:solidFill>
-                    <a:latin typeface="+mn-lt"/>
-                  </a:defRPr>
-                </a:pPr>
-              </a:p>
-            </c:txPr>
-            <c:showLegendKey val="0"/>
-            <c:showVal val="1"/>
-            <c:showCatName val="0"/>
-            <c:showSerName val="0"/>
-            <c:showPercent val="0"/>
-            <c:showBubbleSize val="0"/>
-            <c:showLeaderLines val="0"/>
-          </c:dLbls>
-          <c:dPt>
-            <c:idx val="0"/>
-            <c:invertIfNegative val="0"/>
-            <c:bubble3D val="0"/>
-            <c:spPr>
-              <a:solidFill>
-                <a:srgbClr val="97BC62"/>
-              </a:solidFill>
-              <a:effectLst/>
-            </c:spPr>
-          </c:dPt>
-          <c:dPt>
-            <c:idx val="1"/>
-            <c:invertIfNegative val="0"/>
-            <c:bubble3D val="0"/>
-            <c:spPr>
-              <a:solidFill>
-                <a:srgbClr val="2E6B50"/>
-              </a:solidFill>
-              <a:effectLst/>
-            </c:spPr>
-          </c:dPt>
-          <c:dPt>
-            <c:idx val="2"/>
-            <c:invertIfNegative val="0"/>
-            <c:bubble3D val="0"/>
-            <c:spPr>
-              <a:solidFill>
-                <a:srgbClr val="B8860B"/>
-              </a:solidFill>
-              <a:effectLst/>
-            </c:spPr>
-          </c:dPt>
-          <c:dPt>
-            <c:idx val="3"/>
-            <c:invertIfNegative val="0"/>
-            <c:bubble3D val="0"/>
-            <c:spPr>
-              <a:solidFill>
-                <a:srgbClr val="1F4D3A"/>
-              </a:solidFill>
-              <a:effectLst/>
-            </c:spPr>
-          </c:dPt>
-          <c:cat>
-            <c:multiLvlStrRef>
-              <c:f>Sheet1!$A$2:$A$5</c:f>
-              <c:multiLvlStrCache>
-                <c:ptCount val="4"/>
-                <c:lvl>
-                  <c:pt idx="0">
-                    <c:v>FOB</c:v>
-                  </c:pt>
-                  <c:pt idx="1">
-                    <c:v>Landed</c:v>
-                  </c:pt>
-                  <c:pt idx="2">
-                    <c:v>To distributor</c:v>
-                  </c:pt>
-                  <c:pt idx="3">
-                    <c:v>Shelf price</c:v>
-                  </c:pt>
-                </c:lvl>
-              </c:multiLvlStrCache>
-            </c:multiLvlStrRef>
-          </c:cat>
-          <c:val>
-            <c:numRef>
-              <c:f>Sheet1!$B$2:$B$5</c:f>
-              <c:numCache>
-                <c:formatCode>General</c:formatCode>
-                <c:ptCount val="4"/>
-                <c:pt idx="0">
-                  <c:v>221400</c:v>
-                </c:pt>
-                <c:pt idx="1">
-                  <c:v>236700</c:v>
-                </c:pt>
-                <c:pt idx="2">
-                  <c:v>343215</c:v>
-                </c:pt>
-                <c:pt idx="3">
-                  <c:v>529532</c:v>
-                </c:pt>
-              </c:numCache>
-            </c:numRef>
-          </c:val>
-        </c:ser>
-        <c:dLbls>
-          <c:numFmt formatCode="#,##0" sourceLinked="0"/>
-          <c:txPr>
-            <a:bodyPr/>
-            <a:lstStyle/>
-            <a:p>
-              <a:pPr>
-                <a:defRPr b="0" i="0" strike="noStrike" sz="1100" u="none">
-                  <a:solidFill>
-                    <a:srgbClr val="1A1C1A"/>
-                  </a:solidFill>
-                  <a:latin typeface="+mn-lt"/>
-                </a:defRPr>
-              </a:pPr>
-            </a:p>
-          </c:txPr>
-          <c:showLegendKey val="0"/>
-          <c:showVal val="1"/>
-          <c:showCatName val="0"/>
-          <c:showSerName val="0"/>
-          <c:showPercent val="0"/>
-          <c:showBubbleSize val="0"/>
-          <c:showLeaderLines val="0"/>
-        </c:dLbls>
-        <c:gapWidth val="150"/>
-        <c:overlap val="0"/>
-        <c:axId val="2094734554"/>
-        <c:axId val="2094734552"/>
-        <c:axId val="2094734556"/>
-      </c:barChart>
-      <c:catAx>
-        <c:axId val="2094734554"/>
-        <c:scaling>
-          <c:orientation val="minMax"/>
-        </c:scaling>
-        <c:delete val="0"/>
-        <c:axPos val="b"/>
-        <c:numFmt formatCode="General" sourceLinked="1"/>
-        <c:majorTickMark val="out"/>
-        <c:minorTickMark val="none"/>
-        <c:tickLblPos val="low"/>
-        <c:spPr>
-          <a:ln w="12700" cap="flat">
-            <a:solidFill>
-              <a:srgbClr val="888888"/>
-            </a:solidFill>
-            <a:prstDash val="solid"/>
-            <a:round/>
-          </a:ln>
-        </c:spPr>
-        <c:txPr>
-          <a:bodyPr/>
-          <a:lstStyle/>
-          <a:p>
-            <a:pPr>
-              <a:defRPr sz="1100" b="0" i="0" u="none" strike="noStrike">
-                <a:solidFill>
-                  <a:srgbClr val="1A1C1A"/>
-                </a:solidFill>
-                <a:latin typeface="+mn-lt"/>
-              </a:defRPr>
-            </a:pPr>
-            <a:endParaRPr lang="en-US"/>
-          </a:p>
-        </c:txPr>
-        <c:crossAx val="2094734552"/>
-        <c:crosses val="autoZero"/>
-        <c:auto val="1"/>
-        <c:lblAlgn val="ctr"/>
-        <c:noMultiLvlLbl val="1"/>
-      </c:catAx>
-      <c:valAx>
-        <c:axId val="2094734552"/>
-        <c:scaling>
-          <c:orientation val="minMax"/>
-          <c:max val="620000"/>
+          <c:max val="0.9"/>
         </c:scaling>
         <c:delete val="1"/>
         <c:axPos val="l"/>
@@ -1066,7 +786,7 @@
           <a:p>
             <a:r>
               <a:rPr lang="en-US" dirty="0"/>
-              <a:t/>
+              <a:t>Opening: thank them for the time; Organika has sold in Vietnam for years and is planning the next phase properly.</a:t>
             </a:r>
             <a:endParaRPr lang="en-US" dirty="0"/>
           </a:p>
@@ -2233,27 +1953,7 @@
       </p:grpSpPr>
       <p:sp>
         <p:nvSpPr>
-          <p:cNvPr id="2" name="Shape 0"/>
-          <p:cNvSpPr/>
-          <p:nvPr/>
-        </p:nvSpPr>
-        <p:spPr>
-          <a:xfrm>
-            <a:off x="0" y="0"/>
-            <a:ext cx="12191695" cy="6858000"/>
-          </a:xfrm>
-          <a:prstGeom prst="rect">
-            <a:avLst/>
-          </a:prstGeom>
-          <a:solidFill>
-            <a:srgbClr val="1F4D3A"/>
-          </a:solidFill>
-          <a:ln/>
-        </p:spPr>
-      </p:sp>
-      <p:sp>
-        <p:nvSpPr>
-          <p:cNvPr id="3" name="Text 1"/>
+          <p:cNvPr id="2" name="Text 0"/>
           <p:cNvSpPr txBox="1"/>
           <p:nvPr/>
         </p:nvSpPr>
@@ -2292,7 +1992,7 @@
       </p:sp>
       <p:sp>
         <p:nvSpPr>
-          <p:cNvPr id="4" name="Text 2"/>
+          <p:cNvPr id="3" name="Text 1"/>
           <p:cNvSpPr txBox="1"/>
           <p:nvPr/>
         </p:nvSpPr>
@@ -2312,9 +2012,6 @@
           <a:lstStyle/>
           <a:p>
             <a:pPr indent="0" marL="0">
-              <a:lnSpc>
-                <a:spcPct val="100000"/>
-              </a:lnSpc>
               <a:buNone/>
             </a:pPr>
             <a:r>
@@ -2334,7 +2031,7 @@
       </p:sp>
       <p:sp>
         <p:nvSpPr>
-          <p:cNvPr id="5" name="Text 3"/>
+          <p:cNvPr id="4" name="Text 2"/>
           <p:cNvSpPr txBox="1"/>
           <p:nvPr/>
         </p:nvSpPr>
@@ -2365,7 +2062,7 @@
                 <a:ea typeface="Calibri" pitchFamily="34" charset="-122"/>
                 <a:cs typeface="Calibri" pitchFamily="34" charset="-120"/>
               </a:rPr>
-              <a:t>Collagen · Magnesium · Greens · Probiotics · Fibre · Vitamins</a:t>
+              <a:t>Collagen · Magnesium · Greens · Probiotics · Fibre</a:t>
             </a:r>
             <a:endParaRPr lang="en-US" sz="1500" dirty="0"/>
           </a:p>
@@ -2373,7 +2070,7 @@
       </p:sp>
       <p:sp>
         <p:nvSpPr>
-          <p:cNvPr id="6" name="Text 4"/>
+          <p:cNvPr id="5" name="Text 3"/>
           <p:cNvSpPr txBox="1"/>
           <p:nvPr/>
         </p:nvSpPr>
@@ -2404,7 +2101,7 @@
                 <a:ea typeface="Calibri" pitchFamily="34" charset="-122"/>
                 <a:cs typeface="Calibri" pitchFamily="34" charset="-120"/>
               </a:rPr>
-              <a:t>Louis To · Senior Sales Manager, Emerging Channels</a:t>
+              <a:t>Louis To · Senior Sales Manager, Emerging Channels · Organika Health Products</a:t>
             </a:r>
             <a:endParaRPr lang="en-US" sz="1200" dirty="0"/>
           </a:p>
@@ -2503,13 +2200,10 @@
           <a:lstStyle/>
           <a:p>
             <a:pPr indent="0" marL="0">
-              <a:lnSpc>
-                <a:spcPct val="105000"/>
-              </a:lnSpc>
-              <a:buNone/>
-            </a:pPr>
-            <a:r>
-              <a:rPr lang="en-US" sz="3200" b="1" dirty="0">
+              <a:buNone/>
+            </a:pPr>
+            <a:r>
+              <a:rPr lang="en-US" sz="3000" b="1" dirty="0">
                 <a:solidFill>
                   <a:srgbClr val="FFFFFF"/>
                 </a:solidFill>
@@ -2517,9 +2211,9 @@
                 <a:ea typeface="Cambria" pitchFamily="34" charset="-122"/>
                 <a:cs typeface="Cambria" pitchFamily="34" charset="-120"/>
               </a:rPr>
-              <a:t>A short call to share the range, the price ladder, and the dossier we already hold</a:t>
-            </a:r>
-            <a:endParaRPr lang="en-US" sz="3200" dirty="0"/>
+              <a:t>Agree the range, the pack plan and the registration plan, then set the first milestones together</a:t>
+            </a:r>
+            <a:endParaRPr lang="en-US" sz="3000" dirty="0"/>
           </a:p>
         </p:txBody>
       </p:sp>
@@ -2666,7 +2360,7 @@
                 <a:ea typeface="Cambria" pitchFamily="34" charset="-122"/>
                 <a:cs typeface="Cambria" pitchFamily="34" charset="-120"/>
               </a:rPr>
-              <a:t>A market worth entering, carefully</a:t>
+              <a:t>A market worth building, carefully</a:t>
             </a:r>
             <a:endParaRPr lang="en-US" sz="3000" dirty="0"/>
           </a:p>
@@ -2709,7 +2403,7 @@
         </p:nvSpPr>
         <p:spPr>
           <a:xfrm>
-            <a:off x="685800" y="1965960"/>
+            <a:off x="713232" y="1965960"/>
             <a:ext cx="2331720" cy="822960"/>
           </a:xfrm>
           <a:prstGeom prst="rect">
@@ -2722,7 +2416,7 @@
           <a:bodyPr wrap="square" lIns="0" tIns="0" rIns="0" bIns="0" rtlCol="0" anchor="ctr"/>
           <a:lstStyle/>
           <a:p>
-            <a:pPr algn="l" indent="0" marL="0">
+            <a:pPr indent="0" marL="0">
               <a:buNone/>
             </a:pPr>
             <a:r>
@@ -2748,7 +2442,7 @@
         </p:nvSpPr>
         <p:spPr>
           <a:xfrm>
-            <a:off x="685800" y="2788920"/>
+            <a:off x="713232" y="2788920"/>
             <a:ext cx="2331720" cy="914400"/>
           </a:xfrm>
           <a:prstGeom prst="rect">
@@ -2773,7 +2467,7 @@
                 <a:ea typeface="Calibri" pitchFamily="34" charset="-122"/>
                 <a:cs typeface="Calibri" pitchFamily="34" charset="-120"/>
               </a:rPr>
-              <a:t>market size, 2024 (analyst consensus)</a:t>
+              <a:t>supplement market, 2024 (analyst consensus)</a:t>
             </a:r>
             <a:endParaRPr lang="en-US" sz="1200" dirty="0"/>
           </a:p>
@@ -2816,7 +2510,7 @@
         </p:nvSpPr>
         <p:spPr>
           <a:xfrm>
-            <a:off x="3502152" y="1965960"/>
+            <a:off x="3529584" y="1965960"/>
             <a:ext cx="2331720" cy="822960"/>
           </a:xfrm>
           <a:prstGeom prst="rect">
@@ -2829,7 +2523,7 @@
           <a:bodyPr wrap="square" lIns="0" tIns="0" rIns="0" bIns="0" rtlCol="0" anchor="ctr"/>
           <a:lstStyle/>
           <a:p>
-            <a:pPr algn="l" indent="0" marL="0">
+            <a:pPr indent="0" marL="0">
               <a:buNone/>
             </a:pPr>
             <a:r>
@@ -2855,7 +2549,7 @@
         </p:nvSpPr>
         <p:spPr>
           <a:xfrm>
-            <a:off x="3502152" y="2788920"/>
+            <a:off x="3529584" y="2788920"/>
             <a:ext cx="2331720" cy="914400"/>
           </a:xfrm>
           <a:prstGeom prst="rect">
@@ -2880,7 +2574,7 @@
                 <a:ea typeface="Calibri" pitchFamily="34" charset="-122"/>
                 <a:cs typeface="Calibri" pitchFamily="34" charset="-120"/>
               </a:rPr>
-              <a:t>growth to ~US$1.7B by 2030</a:t>
+              <a:t>growth, to ~US$1.7B by 2030</a:t>
             </a:r>
             <a:endParaRPr lang="en-US" sz="1200" dirty="0"/>
           </a:p>
@@ -2923,7 +2617,7 @@
         </p:nvSpPr>
         <p:spPr>
           <a:xfrm>
-            <a:off x="6318504" y="1965960"/>
+            <a:off x="6345936" y="1965960"/>
             <a:ext cx="2331720" cy="822960"/>
           </a:xfrm>
           <a:prstGeom prst="rect">
@@ -2936,7 +2630,7 @@
           <a:bodyPr wrap="square" lIns="0" tIns="0" rIns="0" bIns="0" rtlCol="0" anchor="ctr"/>
           <a:lstStyle/>
           <a:p>
-            <a:pPr algn="l" indent="0" marL="0">
+            <a:pPr indent="0" marL="0">
               <a:buNone/>
             </a:pPr>
             <a:r>
@@ -2962,7 +2656,7 @@
         </p:nvSpPr>
         <p:spPr>
           <a:xfrm>
-            <a:off x="6318504" y="2788920"/>
+            <a:off x="6345936" y="2788920"/>
             <a:ext cx="2331720" cy="914400"/>
           </a:xfrm>
           <a:prstGeom prst="rect">
@@ -2987,7 +2681,7 @@
                 <a:ea typeface="Calibri" pitchFamily="34" charset="-122"/>
                 <a:cs typeface="Calibri" pitchFamily="34" charset="-120"/>
               </a:rPr>
-              <a:t>fastest-growing supplement market in SE Asia</a:t>
+              <a:t>fastest growing supplement market in Southeast Asia</a:t>
             </a:r>
             <a:endParaRPr lang="en-US" sz="1200" dirty="0"/>
           </a:p>
@@ -3030,7 +2724,7 @@
         </p:nvSpPr>
         <p:spPr>
           <a:xfrm>
-            <a:off x="9134856" y="1965960"/>
+            <a:off x="9162288" y="1965960"/>
             <a:ext cx="2331720" cy="822960"/>
           </a:xfrm>
           <a:prstGeom prst="rect">
@@ -3043,7 +2737,7 @@
           <a:bodyPr wrap="square" lIns="0" tIns="0" rIns="0" bIns="0" rtlCol="0" anchor="ctr"/>
           <a:lstStyle/>
           <a:p>
-            <a:pPr algn="l" indent="0" marL="0">
+            <a:pPr indent="0" marL="0">
               <a:buNone/>
             </a:pPr>
             <a:r>
@@ -3055,7 +2749,7 @@
                 <a:ea typeface="Cambria" pitchFamily="34" charset="-122"/>
                 <a:cs typeface="Cambria" pitchFamily="34" charset="-120"/>
               </a:rPr>
-              <a:t>32.6%</a:t>
+              <a:t>1 in 4</a:t>
             </a:r>
             <a:endParaRPr lang="en-US" sz="3400" dirty="0"/>
           </a:p>
@@ -3069,7 +2763,7 @@
         </p:nvSpPr>
         <p:spPr>
           <a:xfrm>
-            <a:off x="9134856" y="2788920"/>
+            <a:off x="9162288" y="2788920"/>
             <a:ext cx="2331720" cy="914400"/>
           </a:xfrm>
           <a:prstGeom prst="rect">
@@ -3094,7 +2788,7 @@
                 <a:ea typeface="Calibri" pitchFamily="34" charset="-122"/>
                 <a:cs typeface="Calibri" pitchFamily="34" charset="-120"/>
               </a:rPr>
-              <a:t>of online category GMV now from official stores (up from a sliver)</a:t>
+              <a:t>online supplement sales now through official stores (Jan to May 2025)</a:t>
             </a:r>
             <a:endParaRPr lang="en-US" sz="1200" dirty="0"/>
           </a:p>
@@ -3133,7 +2827,7 @@
                 <a:ea typeface="Calibri" pitchFamily="34" charset="-122"/>
                 <a:cs typeface="Calibri" pitchFamily="34" charset="-120"/>
               </a:rPr>
-              <a:t>The 2025 counterfeit crackdown moved demand decisively toward provably genuine imports. That shift is the opening.</a:t>
+              <a:t>The 2025 counterfeit crackdown pushed shoppers toward provably genuine imports. That shift is the opening.</a:t>
             </a:r>
             <a:endParaRPr lang="en-US" sz="1400" dirty="0"/>
           </a:p>
@@ -3172,7 +2866,7 @@
                 <a:ea typeface="Calibri" pitchFamily="34" charset="-122"/>
                 <a:cs typeface="Calibri" pitchFamily="34" charset="-120"/>
               </a:rPr>
-              <a:t>Sources: Grand View Research, Ken Research, Euromonitor, Metric.vn, 2024–26. Figures carry confidence ratings in the full primer.</a:t>
+              <a:t>Sources: Grand View Research and Ken Research (2025); Euromonitor via NutraIngredients (2026); Metric.vn platform data via Đại Biểu Nhân Dân (2025).</a:t>
             </a:r>
             <a:endParaRPr lang="en-US" sz="900" dirty="0"/>
           </a:p>
@@ -3389,7 +3083,7 @@
                 <a:ea typeface="Calibri" pitchFamily="34" charset="-122"/>
                 <a:cs typeface="Calibri" pitchFamily="34" charset="-120"/>
               </a:rPr>
-              <a:t>CROWDED — avoid head-on</a:t>
+              <a:t>CROWDED</a:t>
             </a:r>
             <a:endParaRPr lang="en-US" sz="1400" dirty="0"/>
           </a:p>
@@ -3403,17 +3097,17 @@
         </p:nvSpPr>
         <p:spPr>
           <a:xfrm>
-            <a:off x="868680" y="2286000"/>
-            <a:ext cx="4937760" cy="640080"/>
-          </a:xfrm>
-          <a:prstGeom prst="rect">
-            <a:avLst/>
-          </a:prstGeom>
-          <a:noFill/>
-          <a:ln/>
-        </p:spPr>
-        <p:txBody>
-          <a:bodyPr wrap="square" lIns="0" tIns="0" rIns="0" bIns="0" rtlCol="0" anchor="ctr"/>
+            <a:off x="868680" y="2331720"/>
+            <a:ext cx="4937760" cy="704088"/>
+          </a:xfrm>
+          <a:prstGeom prst="rect">
+            <a:avLst/>
+          </a:prstGeom>
+          <a:noFill/>
+          <a:ln/>
+        </p:spPr>
+        <p:txBody>
+          <a:bodyPr wrap="square" lIns="0" tIns="0" rIns="0" bIns="0" rtlCol="0" anchor="t"/>
           <a:lstStyle/>
           <a:p>
             <a:pPr marL="342900" indent="-342900">
@@ -3429,7 +3123,7 @@
                 <a:ea typeface="Calibri" pitchFamily="34" charset="-122"/>
                 <a:cs typeface="Calibri" pitchFamily="34" charset="-120"/>
               </a:rPr>
-              <a:t>Premium beauty collagen (DHC, Orihiro, 82X, Lemona, Swisse)</a:t>
+              <a:t>Mid fish oil and multivitamins (Blackmores, Doppelherz)</a:t>
             </a:r>
             <a:endParaRPr lang="en-US" sz="1300" dirty="0"/>
           </a:p>
@@ -3443,17 +3137,17 @@
         </p:nvSpPr>
         <p:spPr>
           <a:xfrm>
-            <a:off x="868680" y="2999232"/>
-            <a:ext cx="4937760" cy="640080"/>
-          </a:xfrm>
-          <a:prstGeom prst="rect">
-            <a:avLst/>
-          </a:prstGeom>
-          <a:noFill/>
-          <a:ln/>
-        </p:spPr>
-        <p:txBody>
-          <a:bodyPr wrap="square" lIns="0" tIns="0" rIns="0" bIns="0" rtlCol="0" anchor="ctr"/>
+            <a:off x="868680" y="3081528"/>
+            <a:ext cx="4937760" cy="704088"/>
+          </a:xfrm>
+          <a:prstGeom prst="rect">
+            <a:avLst/>
+          </a:prstGeom>
+          <a:noFill/>
+          <a:ln/>
+        </p:spPr>
+        <p:txBody>
+          <a:bodyPr wrap="square" lIns="0" tIns="0" rIns="0" bIns="0" rtlCol="0" anchor="t"/>
           <a:lstStyle/>
           <a:p>
             <a:pPr marL="342900" indent="-342900">
@@ -3469,7 +3163,7 @@
                 <a:ea typeface="Calibri" pitchFamily="34" charset="-122"/>
                 <a:cs typeface="Calibri" pitchFamily="34" charset="-120"/>
               </a:rPr>
-              <a:t>Mid fish oil &amp; multivitamins (Blackmores, Doppelherz)</a:t>
+              <a:t>Red ginseng gifting (KGC and many others)</a:t>
             </a:r>
             <a:endParaRPr lang="en-US" sz="1300" dirty="0"/>
           </a:p>
@@ -3483,17 +3177,17 @@
         </p:nvSpPr>
         <p:spPr>
           <a:xfrm>
-            <a:off x="868680" y="3712464"/>
-            <a:ext cx="4937760" cy="640080"/>
-          </a:xfrm>
-          <a:prstGeom prst="rect">
-            <a:avLst/>
-          </a:prstGeom>
-          <a:noFill/>
-          <a:ln/>
-        </p:spPr>
-        <p:txBody>
-          <a:bodyPr wrap="square" lIns="0" tIns="0" rIns="0" bIns="0" rtlCol="0" anchor="ctr"/>
+            <a:off x="868680" y="3831336"/>
+            <a:ext cx="4937760" cy="704088"/>
+          </a:xfrm>
+          <a:prstGeom prst="rect">
+            <a:avLst/>
+          </a:prstGeom>
+          <a:noFill/>
+          <a:ln/>
+        </p:spPr>
+        <p:txBody>
+          <a:bodyPr wrap="square" lIns="0" tIns="0" rIns="0" bIns="0" rtlCol="0" anchor="t"/>
           <a:lstStyle/>
           <a:p>
             <a:pPr marL="342900" indent="-342900">
@@ -3509,7 +3203,7 @@
                 <a:ea typeface="Calibri" pitchFamily="34" charset="-122"/>
                 <a:cs typeface="Calibri" pitchFamily="34" charset="-120"/>
               </a:rPr>
-              <a:t>Red ginseng gifting (KGC + many)</a:t>
+              <a:t>Kids DHA and calcium (crowded, and trust damaged in 2025)</a:t>
             </a:r>
             <a:endParaRPr lang="en-US" sz="1300" dirty="0"/>
           </a:p>
@@ -3523,17 +3217,17 @@
         </p:nvSpPr>
         <p:spPr>
           <a:xfrm>
-            <a:off x="868680" y="4425696"/>
-            <a:ext cx="4937760" cy="640080"/>
-          </a:xfrm>
-          <a:prstGeom prst="rect">
-            <a:avLst/>
-          </a:prstGeom>
-          <a:noFill/>
-          <a:ln/>
-        </p:spPr>
-        <p:txBody>
-          <a:bodyPr wrap="square" lIns="0" tIns="0" rIns="0" bIns="0" rtlCol="0" anchor="ctr"/>
+            <a:off x="868680" y="4581144"/>
+            <a:ext cx="4937760" cy="704088"/>
+          </a:xfrm>
+          <a:prstGeom prst="rect">
+            <a:avLst/>
+          </a:prstGeom>
+          <a:noFill/>
+          <a:ln/>
+        </p:spPr>
+        <p:txBody>
+          <a:bodyPr wrap="square" lIns="0" tIns="0" rIns="0" bIns="0" rtlCol="0" anchor="t"/>
           <a:lstStyle/>
           <a:p>
             <a:pPr marL="342900" indent="-342900">
@@ -3549,7 +3243,7 @@
                 <a:ea typeface="Calibri" pitchFamily="34" charset="-122"/>
                 <a:cs typeface="Calibri" pitchFamily="34" charset="-120"/>
               </a:rPr>
-              <a:t>Kids DHA / calcium (crowded and trust-damaged)</a:t>
+              <a:t>Beauty collagen at mass prices (many Korean and local brands)</a:t>
             </a:r>
             <a:endParaRPr lang="en-US" sz="1300" dirty="0"/>
           </a:p>
@@ -3617,7 +3311,7 @@
                 <a:ea typeface="Calibri" pitchFamily="34" charset="-122"/>
                 <a:cs typeface="Calibri" pitchFamily="34" charset="-120"/>
               </a:rPr>
-              <a:t>OPEN — our lane</a:t>
+              <a:t>OPEN</a:t>
             </a:r>
             <a:endParaRPr lang="en-US" sz="1400" dirty="0"/>
           </a:p>
@@ -3631,17 +3325,17 @@
         </p:nvSpPr>
         <p:spPr>
           <a:xfrm>
-            <a:off x="6537960" y="2286000"/>
-            <a:ext cx="4846320" cy="640080"/>
-          </a:xfrm>
-          <a:prstGeom prst="rect">
-            <a:avLst/>
-          </a:prstGeom>
-          <a:noFill/>
-          <a:ln/>
-        </p:spPr>
-        <p:txBody>
-          <a:bodyPr wrap="square" lIns="0" tIns="0" rIns="0" bIns="0" rtlCol="0" anchor="ctr"/>
+            <a:off x="6537960" y="2331720"/>
+            <a:ext cx="4846320" cy="704088"/>
+          </a:xfrm>
+          <a:prstGeom prst="rect">
+            <a:avLst/>
+          </a:prstGeom>
+          <a:noFill/>
+          <a:ln/>
+        </p:spPr>
+        <p:txBody>
+          <a:bodyPr wrap="square" lIns="0" tIns="0" rIns="0" bIns="0" rtlCol="0" anchor="t"/>
           <a:lstStyle/>
           <a:p>
             <a:pPr marL="342900" indent="-342900">
@@ -3657,7 +3351,7 @@
                 <a:ea typeface="Calibri" pitchFamily="34" charset="-122"/>
                 <a:cs typeface="Calibri" pitchFamily="34" charset="-120"/>
               </a:rPr>
-              <a:t>Magnesium (chelated) — no official premium brand</a:t>
+              <a:t>Chelated sleep and stress magnesium: no official brand owns it</a:t>
             </a:r>
             <a:endParaRPr lang="en-US" sz="1300" dirty="0"/>
           </a:p>
@@ -3671,17 +3365,17 @@
         </p:nvSpPr>
         <p:spPr>
           <a:xfrm>
-            <a:off x="6537960" y="2999232"/>
-            <a:ext cx="4846320" cy="640080"/>
-          </a:xfrm>
-          <a:prstGeom prst="rect">
-            <a:avLst/>
-          </a:prstGeom>
-          <a:noFill/>
-          <a:ln/>
-        </p:spPr>
-        <p:txBody>
-          <a:bodyPr wrap="square" lIns="0" tIns="0" rIns="0" bIns="0" rtlCol="0" anchor="ctr"/>
+            <a:off x="6537960" y="3081528"/>
+            <a:ext cx="4846320" cy="704088"/>
+          </a:xfrm>
+          <a:prstGeom prst="rect">
+            <a:avLst/>
+          </a:prstGeom>
+          <a:noFill/>
+          <a:ln/>
+        </p:spPr>
+        <p:txBody>
+          <a:bodyPr wrap="square" lIns="0" tIns="0" rIns="0" bIns="0" rtlCol="0" anchor="t"/>
           <a:lstStyle/>
           <a:p>
             <a:pPr marL="342900" indent="-342900">
@@ -3697,7 +3391,7 @@
                 <a:ea typeface="Calibri" pitchFamily="34" charset="-122"/>
                 <a:cs typeface="Calibri" pitchFamily="34" charset="-120"/>
               </a:rPr>
-              <a:t>Greens / daily superfood — effectively vacant</a:t>
+              <a:t>Daily greens powder: only a Japanese aojiru niche</a:t>
             </a:r>
             <a:endParaRPr lang="en-US" sz="1300" dirty="0"/>
           </a:p>
@@ -3711,17 +3405,17 @@
         </p:nvSpPr>
         <p:spPr>
           <a:xfrm>
-            <a:off x="6537960" y="3712464"/>
-            <a:ext cx="4846320" cy="640080"/>
-          </a:xfrm>
-          <a:prstGeom prst="rect">
-            <a:avLst/>
-          </a:prstGeom>
-          <a:noFill/>
-          <a:ln/>
-        </p:spPr>
-        <p:txBody>
-          <a:bodyPr wrap="square" lIns="0" tIns="0" rIns="0" bIns="0" rtlCol="0" anchor="ctr"/>
+            <a:off x="6537960" y="3831336"/>
+            <a:ext cx="4846320" cy="704088"/>
+          </a:xfrm>
+          <a:prstGeom prst="rect">
+            <a:avLst/>
+          </a:prstGeom>
+          <a:noFill/>
+          <a:ln/>
+        </p:spPr>
+        <p:txBody>
+          <a:bodyPr wrap="square" lIns="0" tIns="0" rIns="0" bIns="0" rtlCol="0" anchor="t"/>
           <a:lstStyle/>
           <a:p>
             <a:pPr marL="342900" indent="-342900">
@@ -3737,7 +3431,7 @@
                 <a:ea typeface="Calibri" pitchFamily="34" charset="-122"/>
                 <a:cs typeface="Calibri" pitchFamily="34" charset="-120"/>
               </a:rPr>
-              <a:t>Menopause / 50+ non-dairy — thin</a:t>
+              <a:t>Premium Canadian collagen below Japanese prices</a:t>
             </a:r>
             <a:endParaRPr lang="en-US" sz="1300" dirty="0"/>
           </a:p>
@@ -3751,17 +3445,17 @@
         </p:nvSpPr>
         <p:spPr>
           <a:xfrm>
-            <a:off x="6537960" y="4425696"/>
-            <a:ext cx="4846320" cy="640080"/>
-          </a:xfrm>
-          <a:prstGeom prst="rect">
-            <a:avLst/>
-          </a:prstGeom>
-          <a:noFill/>
-          <a:ln/>
-        </p:spPr>
-        <p:txBody>
-          <a:bodyPr wrap="square" lIns="0" tIns="0" rIns="0" bIns="0" rtlCol="0" anchor="ctr"/>
+            <a:off x="6537960" y="4581144"/>
+            <a:ext cx="4846320" cy="704088"/>
+          </a:xfrm>
+          <a:prstGeom prst="rect">
+            <a:avLst/>
+          </a:prstGeom>
+          <a:noFill/>
+          <a:ln/>
+        </p:spPr>
+        <p:txBody>
+          <a:bodyPr wrap="square" lIns="0" tIns="0" rIns="0" bIns="0" rtlCol="0" anchor="t"/>
           <a:lstStyle/>
           <a:p>
             <a:pPr marL="342900" indent="-342900">
@@ -3777,7 +3471,7 @@
                 <a:ea typeface="Calibri" pitchFamily="34" charset="-122"/>
                 <a:cs typeface="Calibri" pitchFamily="34" charset="-120"/>
               </a:rPr>
-              <a:t>Clean-label Canadian — no flagship exists yet</a:t>
+              <a:t>Clean label Canadian: no Canadian brand at scale yet</a:t>
             </a:r>
             <a:endParaRPr lang="en-US" sz="1300" dirty="0"/>
           </a:p>
@@ -3926,7 +3620,7 @@
                 <a:ea typeface="Cambria" pitchFamily="34" charset="-122"/>
                 <a:cs typeface="Cambria" pitchFamily="34" charset="-120"/>
               </a:rPr>
-              <a:t>Lead with the open shelves, not the crowded one</a:t>
+              <a:t>Lead where Organika is open and priced to win</a:t>
             </a:r>
             <a:endParaRPr lang="en-US" sz="3000" dirty="0"/>
           </a:p>
@@ -3970,7 +3664,7 @@
         <p:spPr>
           <a:xfrm>
             <a:off x="777240" y="1819656"/>
-            <a:ext cx="3657600" cy="658368"/>
+            <a:ext cx="3474720" cy="658368"/>
           </a:xfrm>
           <a:prstGeom prst="rect">
             <a:avLst/>
@@ -3994,7 +3688,7 @@
                 <a:ea typeface="Calibri" pitchFamily="34" charset="-122"/>
                 <a:cs typeface="Calibri" pitchFamily="34" charset="-120"/>
               </a:rPr>
-              <a:t>Magnesium bisglycinate</a:t>
+              <a:t>Enhanced Collagen</a:t>
             </a:r>
             <a:endParaRPr lang="en-US" sz="1500" dirty="0"/>
           </a:p>
@@ -4008,8 +3702,8 @@
         </p:nvSpPr>
         <p:spPr>
           <a:xfrm>
-            <a:off x="4480560" y="1819656"/>
-            <a:ext cx="1463040" cy="658368"/>
+            <a:off x="4297680" y="1819656"/>
+            <a:ext cx="1371600" cy="658368"/>
           </a:xfrm>
           <a:prstGeom prst="rect">
             <a:avLst/>
@@ -4047,8 +3741,8 @@
         </p:nvSpPr>
         <p:spPr>
           <a:xfrm>
-            <a:off x="6035040" y="1819656"/>
-            <a:ext cx="5486400" cy="658368"/>
+            <a:off x="5760720" y="1819656"/>
+            <a:ext cx="5760720" cy="658368"/>
           </a:xfrm>
           <a:prstGeom prst="rect">
             <a:avLst/>
@@ -4072,7 +3766,7 @@
                 <a:ea typeface="Calibri" pitchFamily="34" charset="-122"/>
                 <a:cs typeface="Calibri" pitchFamily="34" charset="-120"/>
               </a:rPr>
-              <a:t>Own the official premium chelated gap</a:t>
+              <a:t>Fits the premium band today; Canadian quality story and a Tet gift format</a:t>
             </a:r>
             <a:endParaRPr lang="en-US" sz="1300" dirty="0"/>
           </a:p>
@@ -4116,7 +3810,7 @@
         <p:spPr>
           <a:xfrm>
             <a:off x="777240" y="2660904"/>
-            <a:ext cx="3657600" cy="658368"/>
+            <a:ext cx="3474720" cy="658368"/>
           </a:xfrm>
           <a:prstGeom prst="rect">
             <a:avLst/>
@@ -4140,7 +3834,7 @@
                 <a:ea typeface="Calibri" pitchFamily="34" charset="-122"/>
                 <a:cs typeface="Calibri" pitchFamily="34" charset="-120"/>
               </a:rPr>
-              <a:t>Greens / superfood</a:t>
+              <a:t>Magnesium bisglycinate</a:t>
             </a:r>
             <a:endParaRPr lang="en-US" sz="1500" dirty="0"/>
           </a:p>
@@ -4154,8 +3848,8 @@
         </p:nvSpPr>
         <p:spPr>
           <a:xfrm>
-            <a:off x="4480560" y="2660904"/>
-            <a:ext cx="1463040" cy="658368"/>
+            <a:off x="4297680" y="2660904"/>
+            <a:ext cx="1371600" cy="658368"/>
           </a:xfrm>
           <a:prstGeom prst="rect">
             <a:avLst/>
@@ -4193,8 +3887,8 @@
         </p:nvSpPr>
         <p:spPr>
           <a:xfrm>
-            <a:off x="6035040" y="2660904"/>
-            <a:ext cx="5486400" cy="658368"/>
+            <a:off x="5760720" y="2660904"/>
+            <a:ext cx="5760720" cy="658368"/>
           </a:xfrm>
           <a:prstGeom prst="rect">
             <a:avLst/>
@@ -4218,7 +3912,7 @@
                 <a:ea typeface="Calibri" pitchFamily="34" charset="-122"/>
                 <a:cs typeface="Calibri" pitchFamily="34" charset="-120"/>
               </a:rPr>
-              <a:t>First mover on daily greens</a:t>
+              <a:t>Open shelf; launched in a Vietnam pack sized to its price band</a:t>
             </a:r>
             <a:endParaRPr lang="en-US" sz="1300" dirty="0"/>
           </a:p>
@@ -4262,7 +3956,7 @@
         <p:spPr>
           <a:xfrm>
             <a:off x="777240" y="3502152"/>
-            <a:ext cx="3657600" cy="658368"/>
+            <a:ext cx="3474720" cy="658368"/>
           </a:xfrm>
           <a:prstGeom prst="rect">
             <a:avLst/>
@@ -4286,7 +3980,7 @@
                 <a:ea typeface="Calibri" pitchFamily="34" charset="-122"/>
                 <a:cs typeface="Calibri" pitchFamily="34" charset="-120"/>
               </a:rPr>
-              <a:t>Enhanced Collagen</a:t>
+              <a:t>Greens</a:t>
             </a:r>
             <a:endParaRPr lang="en-US" sz="1500" dirty="0"/>
           </a:p>
@@ -4300,8 +3994,8 @@
         </p:nvSpPr>
         <p:spPr>
           <a:xfrm>
-            <a:off x="4480560" y="3502152"/>
-            <a:ext cx="1463040" cy="658368"/>
+            <a:off x="4297680" y="3502152"/>
+            <a:ext cx="1371600" cy="658368"/>
           </a:xfrm>
           <a:prstGeom prst="rect">
             <a:avLst/>
@@ -4325,7 +4019,7 @@
                 <a:ea typeface="Calibri" pitchFamily="34" charset="-122"/>
                 <a:cs typeface="Calibri" pitchFamily="34" charset="-120"/>
               </a:rPr>
-              <a:t>FLAG</a:t>
+              <a:t>NEXT</a:t>
             </a:r>
             <a:endParaRPr lang="en-US" sz="1300" dirty="0"/>
           </a:p>
@@ -4339,8 +4033,8 @@
         </p:nvSpPr>
         <p:spPr>
           <a:xfrm>
-            <a:off x="6035040" y="3502152"/>
-            <a:ext cx="5486400" cy="658368"/>
+            <a:off x="5760720" y="3502152"/>
+            <a:ext cx="5760720" cy="658368"/>
           </a:xfrm>
           <a:prstGeom prst="rect">
             <a:avLst/>
@@ -4364,7 +4058,7 @@
                 <a:ea typeface="Calibri" pitchFamily="34" charset="-122"/>
                 <a:cs typeface="Calibri" pitchFamily="34" charset="-120"/>
               </a:rPr>
-              <a:t>Carries the Canada story; Tet gift format</a:t>
+              <a:t>Open shelf; follows in a smaller format so it lands inside the band</a:t>
             </a:r>
             <a:endParaRPr lang="en-US" sz="1300" dirty="0"/>
           </a:p>
@@ -4408,7 +4102,7 @@
         <p:spPr>
           <a:xfrm>
             <a:off x="777240" y="4343400"/>
-            <a:ext cx="3657600" cy="658368"/>
+            <a:ext cx="3474720" cy="658368"/>
           </a:xfrm>
           <a:prstGeom prst="rect">
             <a:avLst/>
@@ -4446,8 +4140,8 @@
         </p:nvSpPr>
         <p:spPr>
           <a:xfrm>
-            <a:off x="4480560" y="4343400"/>
-            <a:ext cx="1463040" cy="658368"/>
+            <a:off x="4297680" y="4343400"/>
+            <a:ext cx="1371600" cy="658368"/>
           </a:xfrm>
           <a:prstGeom prst="rect">
             <a:avLst/>
@@ -4485,8 +4179,8 @@
         </p:nvSpPr>
         <p:spPr>
           <a:xfrm>
-            <a:off x="6035040" y="4343400"/>
-            <a:ext cx="5486400" cy="658368"/>
+            <a:off x="5760720" y="4343400"/>
+            <a:ext cx="5760720" cy="658368"/>
           </a:xfrm>
           <a:prstGeom prst="rect">
             <a:avLst/>
@@ -4510,7 +4204,7 @@
                 <a:ea typeface="Calibri" pitchFamily="34" charset="-122"/>
                 <a:cs typeface="Calibri" pitchFamily="34" charset="-120"/>
               </a:rPr>
-              <a:t>Needs a strain/format differentiator</a:t>
+              <a:t>Joins once we have a clear strain or format advantage</a:t>
             </a:r>
             <a:endParaRPr lang="en-US" sz="1300" dirty="0"/>
           </a:p>
@@ -4554,7 +4248,7 @@
         <p:spPr>
           <a:xfrm>
             <a:off x="777240" y="5184648"/>
-            <a:ext cx="3657600" cy="658368"/>
+            <a:ext cx="3474720" cy="658368"/>
           </a:xfrm>
           <a:prstGeom prst="rect">
             <a:avLst/>
@@ -4578,7 +4272,7 @@
                 <a:ea typeface="Calibri" pitchFamily="34" charset="-122"/>
                 <a:cs typeface="Calibri" pitchFamily="34" charset="-120"/>
               </a:rPr>
-              <a:t>Fibre · Vitamin C</a:t>
+              <a:t>Fibre</a:t>
             </a:r>
             <a:endParaRPr lang="en-US" sz="1500" dirty="0"/>
           </a:p>
@@ -4592,8 +4286,8 @@
         </p:nvSpPr>
         <p:spPr>
           <a:xfrm>
-            <a:off x="4480560" y="5184648"/>
-            <a:ext cx="1463040" cy="658368"/>
+            <a:off x="4297680" y="5184648"/>
+            <a:ext cx="1371600" cy="658368"/>
           </a:xfrm>
           <a:prstGeom prst="rect">
             <a:avLst/>
@@ -4617,7 +4311,7 @@
                 <a:ea typeface="Calibri" pitchFamily="34" charset="-122"/>
                 <a:cs typeface="Calibri" pitchFamily="34" charset="-120"/>
               </a:rPr>
-              <a:t>FILLER</a:t>
+              <a:t>LATER</a:t>
             </a:r>
             <a:endParaRPr lang="en-US" sz="1300" dirty="0"/>
           </a:p>
@@ -4631,8 +4325,8 @@
         </p:nvSpPr>
         <p:spPr>
           <a:xfrm>
-            <a:off x="6035040" y="5184648"/>
-            <a:ext cx="5486400" cy="658368"/>
+            <a:off x="5760720" y="5184648"/>
+            <a:ext cx="5760720" cy="658368"/>
           </a:xfrm>
           <a:prstGeom prst="rect">
             <a:avLst/>
@@ -4656,7 +4350,7 @@
                 <a:ea typeface="Calibri" pitchFamily="34" charset="-122"/>
                 <a:cs typeface="Calibri" pitchFamily="34" charset="-120"/>
               </a:rPr>
-              <a:t>Round out the range; do not lead on price</a:t>
+              <a:t>Rounds out the range once the core is selling</a:t>
             </a:r>
             <a:endParaRPr lang="en-US" sz="1300" dirty="0"/>
           </a:p>
@@ -4805,7 +4499,7 @@
                 <a:ea typeface="Cambria" pitchFamily="34" charset="-122"/>
                 <a:cs typeface="Cambria" pitchFamily="34" charset="-120"/>
               </a:rPr>
-              <a:t>Why now: the flight to genuine goods</a:t>
+              <a:t>Why now: shoppers are moving to genuine</a:t>
             </a:r>
             <a:endParaRPr lang="en-US" sz="3000" dirty="0"/>
           </a:p>
@@ -4904,16 +4598,16 @@
         <p:spPr>
           <a:xfrm>
             <a:off x="6903720" y="2377440"/>
-            <a:ext cx="4480560" cy="914400"/>
-          </a:xfrm>
-          <a:prstGeom prst="rect">
-            <a:avLst/>
-          </a:prstGeom>
-          <a:noFill/>
-          <a:ln/>
-        </p:spPr>
-        <p:txBody>
-          <a:bodyPr wrap="square" lIns="0" tIns="0" rIns="0" bIns="0" rtlCol="0" anchor="ctr"/>
+            <a:ext cx="4480560" cy="1005840"/>
+          </a:xfrm>
+          <a:prstGeom prst="rect">
+            <a:avLst/>
+          </a:prstGeom>
+          <a:noFill/>
+          <a:ln/>
+        </p:spPr>
+        <p:txBody>
+          <a:bodyPr wrap="square" lIns="0" tIns="0" rIns="0" bIns="0" rtlCol="0" anchor="t"/>
           <a:lstStyle/>
           <a:p>
             <a:pPr marL="342900" indent="-342900">
@@ -4929,7 +4623,7 @@
                 <a:ea typeface="Calibri" pitchFamily="34" charset="-122"/>
                 <a:cs typeface="Calibri" pitchFamily="34" charset="-120"/>
               </a:rPr>
-              <a:t>67% of consumers rank "guaranteed genuine" as their #1 demand — above cheaper price or shipping</a:t>
+              <a:t>67% of online shoppers rank guaranteed genuine goods as the top improvement they want, ahead of discounts (41%)</a:t>
             </a:r>
             <a:endParaRPr lang="en-US" sz="1250" dirty="0"/>
           </a:p>
@@ -4943,17 +4637,17 @@
         </p:nvSpPr>
         <p:spPr>
           <a:xfrm>
-            <a:off x="6903720" y="3337560"/>
-            <a:ext cx="4480560" cy="914400"/>
-          </a:xfrm>
-          <a:prstGeom prst="rect">
-            <a:avLst/>
-          </a:prstGeom>
-          <a:noFill/>
-          <a:ln/>
-        </p:spPr>
-        <p:txBody>
-          <a:bodyPr wrap="square" lIns="0" tIns="0" rIns="0" bIns="0" rtlCol="0" anchor="ctr"/>
+            <a:off x="6903720" y="3429000"/>
+            <a:ext cx="4480560" cy="1005840"/>
+          </a:xfrm>
+          <a:prstGeom prst="rect">
+            <a:avLst/>
+          </a:prstGeom>
+          <a:noFill/>
+          <a:ln/>
+        </p:spPr>
+        <p:txBody>
+          <a:bodyPr wrap="square" lIns="0" tIns="0" rIns="0" bIns="0" rtlCol="0" anchor="t"/>
           <a:lstStyle/>
           <a:p>
             <a:pPr marL="342900" indent="-342900">
@@ -4969,7 +4663,7 @@
                 <a:ea typeface="Calibri" pitchFamily="34" charset="-122"/>
                 <a:cs typeface="Calibri" pitchFamily="34" charset="-120"/>
               </a:rPr>
-              <a:t>Celebrity and factory counterfeit cases ended in prison in 2025</a:t>
+              <a:t>Online supplement sales fell 22% in USD in 2025 as fakes were purged, while official stores gained share</a:t>
             </a:r>
             <a:endParaRPr lang="en-US" sz="1250" dirty="0"/>
           </a:p>
@@ -4983,17 +4677,17 @@
         </p:nvSpPr>
         <p:spPr>
           <a:xfrm>
-            <a:off x="6903720" y="4297680"/>
-            <a:ext cx="4480560" cy="914400"/>
-          </a:xfrm>
-          <a:prstGeom prst="rect">
-            <a:avLst/>
-          </a:prstGeom>
-          <a:noFill/>
-          <a:ln/>
-        </p:spPr>
-        <p:txBody>
-          <a:bodyPr wrap="square" lIns="0" tIns="0" rIns="0" bIns="0" rtlCol="0" anchor="ctr"/>
+            <a:off x="6903720" y="4480560"/>
+            <a:ext cx="4480560" cy="1005840"/>
+          </a:xfrm>
+          <a:prstGeom prst="rect">
+            <a:avLst/>
+          </a:prstGeom>
+          <a:noFill/>
+          <a:ln/>
+        </p:spPr>
+        <p:txBody>
+          <a:bodyPr wrap="square" lIns="0" tIns="0" rIns="0" bIns="0" rtlCol="0" anchor="t"/>
           <a:lstStyle/>
           <a:p>
             <a:pPr marL="342900" indent="-342900">
@@ -5009,7 +4703,7 @@
                 <a:ea typeface="Calibri" pitchFamily="34" charset="-122"/>
                 <a:cs typeface="Calibri" pitchFamily="34" charset="-120"/>
               </a:rPr>
-              <a:t>A provably authentic import with QR, a named importer and chain listing is exactly the trade the crackdown created</a:t>
+              <a:t>Influencers were jailed for false health product claims in November 2025; the former food safety chief got 20 years in January 2026</a:t>
             </a:r>
             <a:endParaRPr lang="en-US" sz="1250" dirty="0"/>
           </a:p>
@@ -5018,6 +4712,45 @@
       <p:sp>
         <p:nvSpPr>
           <p:cNvPr id="9" name="Text 6"/>
+          <p:cNvSpPr txBox="1"/>
+          <p:nvPr/>
+        </p:nvSpPr>
+        <p:spPr>
+          <a:xfrm>
+            <a:off x="548640" y="5943600"/>
+            <a:ext cx="11064240" cy="320040"/>
+          </a:xfrm>
+          <a:prstGeom prst="rect">
+            <a:avLst/>
+          </a:prstGeom>
+          <a:noFill/>
+          <a:ln/>
+        </p:spPr>
+        <p:txBody>
+          <a:bodyPr wrap="square" lIns="0" tIns="0" rIns="0" bIns="0" rtlCol="0" anchor="ctr"/>
+          <a:lstStyle/>
+          <a:p>
+            <a:pPr indent="0" marL="0">
+              <a:buNone/>
+            </a:pPr>
+            <a:r>
+              <a:rPr lang="en-US" sz="900" dirty="0">
+                <a:solidFill>
+                  <a:srgbClr val="5C635C"/>
+                </a:solidFill>
+                <a:latin typeface="Calibri" pitchFamily="34" charset="0"/>
+                <a:ea typeface="Calibri" pitchFamily="34" charset="-122"/>
+                <a:cs typeface="Calibri" pitchFamily="34" charset="-120"/>
+              </a:rPr>
+              <a:t>Sources: Metric.vn via Đại Biểu Nhân Dân (2025); VnExpress (2026); court reporting (VnExpress, Thanh Niên).</a:t>
+            </a:r>
+            <a:endParaRPr lang="en-US" sz="900" dirty="0"/>
+          </a:p>
+        </p:txBody>
+      </p:sp>
+      <p:sp>
+        <p:nvSpPr>
+          <p:cNvPr id="10" name="Text 7"/>
           <p:cNvSpPr txBox="1"/>
           <p:nvPr/>
         </p:nvSpPr>
@@ -5056,7 +4789,7 @@
       </p:sp>
       <p:sp>
         <p:nvSpPr>
-          <p:cNvPr id="10" name="Text 7"/>
+          <p:cNvPr id="11" name="Text 8"/>
           <p:cNvSpPr txBox="1"/>
           <p:nvPr/>
         </p:nvSpPr>
@@ -5226,7 +4959,7 @@
                 <a:ea typeface="Calibri" pitchFamily="34" charset="-122"/>
                 <a:cs typeface="Calibri" pitchFamily="34" charset="-120"/>
               </a:rPr>
-              <a:t>Registration-ready</a:t>
+              <a:t>Registration support</a:t>
             </a:r>
             <a:endParaRPr lang="en-US" sz="1500" dirty="0"/>
           </a:p>
@@ -5265,7 +4998,7 @@
                 <a:ea typeface="Calibri" pitchFamily="34" charset="-122"/>
                 <a:cs typeface="Calibri" pitchFamily="34" charset="-120"/>
               </a:rPr>
-              <a:t>Consularized free-sale certificate, GMP, lab tests, claim evidence — the dossier gate, cleared</a:t>
+              <a:t>GMP certified Canadian manufacturing, free sale certificates and lab testing to build each dossier</a:t>
             </a:r>
             <a:endParaRPr lang="en-US" sz="1200" dirty="0"/>
           </a:p>
@@ -5372,7 +5105,7 @@
                 <a:ea typeface="Calibri" pitchFamily="34" charset="-122"/>
                 <a:cs typeface="Calibri" pitchFamily="34" charset="-120"/>
               </a:rPr>
-              <a:t>A launch budget: pharmacist education, KOC within the rules, Mall-store vouchers</a:t>
+              <a:t>A launch budget for pharmacist education, compliant KOC content and official store vouchers</a:t>
             </a:r>
             <a:endParaRPr lang="en-US" sz="1200" dirty="0"/>
           </a:p>
@@ -5440,7 +5173,7 @@
                 <a:ea typeface="Calibri" pitchFamily="34" charset="-122"/>
                 <a:cs typeface="Calibri" pitchFamily="34" charset="-120"/>
               </a:rPr>
-              <a:t>Grey-market control</a:t>
+              <a:t>Grey market control</a:t>
             </a:r>
             <a:endParaRPr lang="en-US" sz="1500" dirty="0"/>
           </a:p>
@@ -5479,7 +5212,7 @@
                 <a:ea typeface="Calibri" pitchFamily="34" charset="-122"/>
                 <a:cs typeface="Calibri" pitchFamily="34" charset="-120"/>
               </a:rPr>
-              <a:t>Vietnam-specific packs and a price ladder so our own Canadian stock does not undercut you</a:t>
+              <a:t>Vietnam packs and a price ladder so stock bought abroad does not undercut your shelf</a:t>
             </a:r>
             <a:endParaRPr lang="en-US" sz="1200" dirty="0"/>
           </a:p>
@@ -5586,7 +5319,7 @@
                 <a:ea typeface="Calibri" pitchFamily="34" charset="-122"/>
                 <a:cs typeface="Calibri" pitchFamily="34" charset="-120"/>
               </a:rPr>
-              <a:t>List prices built 25–35% above everyday-promo so Tet and double-days are fundable</a:t>
+              <a:t>List prices set with room for Tet and double day campaigns</a:t>
             </a:r>
             <a:endParaRPr lang="en-US" sz="1200" dirty="0"/>
           </a:p>
@@ -5693,7 +5426,7 @@
                 <a:ea typeface="Calibri" pitchFamily="34" charset="-122"/>
                 <a:cs typeface="Calibri" pitchFamily="34" charset="-120"/>
               </a:rPr>
-              <a:t>Canada ranks #1 on the 2022 global food-safety quality sub-index</a:t>
+              <a:t>Canada ranked first in the world on food quality and safety (Global Food Security Index, 2022)</a:t>
             </a:r>
             <a:endParaRPr lang="en-US" sz="1200" dirty="0"/>
           </a:p>
@@ -5761,7 +5494,7 @@
                 <a:ea typeface="Calibri" pitchFamily="34" charset="-122"/>
                 <a:cs typeface="Calibri" pitchFamily="34" charset="-120"/>
               </a:rPr>
-              <a:t>We hold the registrations</a:t>
+              <a:t>A clear registration plan</a:t>
             </a:r>
             <a:endParaRPr lang="en-US" sz="1500" dirty="0"/>
           </a:p>
@@ -5800,7 +5533,7 @@
                 <a:ea typeface="Calibri" pitchFamily="34" charset="-122"/>
                 <a:cs typeface="Calibri" pitchFamily="34" charset="-120"/>
               </a:rPr>
-              <a:t>So neither side is ever held hostage if the relationship changes</a:t>
+              <a:t>Who files, who holds, and how a handover works, agreed up front in writing</a:t>
             </a:r>
             <a:endParaRPr lang="en-US" sz="1200" dirty="0"/>
           </a:p>
@@ -6032,7 +5765,7 @@
         <p:spPr>
           <a:xfrm>
             <a:off x="1828800" y="2029968"/>
-            <a:ext cx="3657600" cy="457200"/>
+            <a:ext cx="5486400" cy="457200"/>
           </a:xfrm>
           <a:prstGeom prst="rect">
             <a:avLst/>
@@ -6095,7 +5828,7 @@
                 <a:ea typeface="Calibri" pitchFamily="34" charset="-122"/>
                 <a:cs typeface="Calibri" pitchFamily="34" charset="-120"/>
               </a:rPr>
-              <a:t>Pharmacy chains — Long Chau first — plus official Mall stores on Shopee and TikTok Shop</a:t>
+              <a:t>Pharmacy chains, Long Chau first, plus official stores on Shopee and TikTok Shop</a:t>
             </a:r>
             <a:endParaRPr lang="en-US" sz="1300" dirty="0"/>
           </a:p>
@@ -6178,7 +5911,7 @@
         <p:spPr>
           <a:xfrm>
             <a:off x="1828800" y="3401568"/>
-            <a:ext cx="3657600" cy="457200"/>
+            <a:ext cx="5486400" cy="457200"/>
           </a:xfrm>
           <a:prstGeom prst="rect">
             <a:avLst/>
@@ -6241,7 +5974,7 @@
                 <a:ea typeface="Calibri" pitchFamily="34" charset="-122"/>
                 <a:cs typeface="Calibri" pitchFamily="34" charset="-120"/>
               </a:rPr>
-              <a:t>National exclusivity gated on volume milestones, so you carry the upside and we both invest</a:t>
+              <a:t>National exclusivity tied to agreed volume milestones, so both sides have a reason to invest</a:t>
             </a:r>
             <a:endParaRPr lang="en-US" sz="1300" dirty="0"/>
           </a:p>
@@ -6324,7 +6057,7 @@
         <p:spPr>
           <a:xfrm>
             <a:off x="1828800" y="4773168"/>
-            <a:ext cx="3657600" cy="457200"/>
+            <a:ext cx="5486400" cy="457200"/>
           </a:xfrm>
           <a:prstGeom prst="rect">
             <a:avLst/>
@@ -6348,7 +6081,7 @@
                 <a:ea typeface="Calibri" pitchFamily="34" charset="-122"/>
                 <a:cs typeface="Calibri" pitchFamily="34" charset="-120"/>
               </a:rPr>
-              <a:t>A named owner</a:t>
+              <a:t>One accountable owner</a:t>
             </a:r>
             <a:endParaRPr lang="en-US" sz="1700" dirty="0"/>
           </a:p>
@@ -6387,7 +6120,7 @@
                 <a:ea typeface="Calibri" pitchFamily="34" charset="-122"/>
                 <a:cs typeface="Calibri" pitchFamily="34" charset="-120"/>
               </a:rPr>
-              <a:t>A brand manager who treats this as a build, not a filler line on a catalogue</a:t>
+              <a:t>A named brand owner for Organika and a quarterly business review together</a:t>
             </a:r>
             <a:endParaRPr lang="en-US" sz="1300" dirty="0"/>
           </a:p>
@@ -6536,7 +6269,7 @@
                 <a:ea typeface="Cambria" pitchFamily="34" charset="-122"/>
                 <a:cs typeface="Cambria" pitchFamily="34" charset="-120"/>
               </a:rPr>
-              <a:t>The economics work, with promo room built in</a:t>
+              <a:t>Priced to win the shelf, with room to promote</a:t>
             </a:r>
             <a:endParaRPr lang="en-US" sz="3000" dirty="0"/>
           </a:p>
@@ -6575,46 +6308,30 @@
                 <a:ea typeface="Calibri" pitchFamily="34" charset="-122"/>
                 <a:cs typeface="Calibri" pitchFamily="34" charset="-120"/>
               </a:rPr>
-              <a:t>Illustrative, premium collagen, CAD 12 FOB at CPTPP 0% duty — model, to be set on real costs</a:t>
+              <a:t>Target shelf prices; final pricing is set together with our partner</a:t>
             </a:r>
             <a:endParaRPr lang="en-US" sz="1300" dirty="0"/>
           </a:p>
         </p:txBody>
       </p:sp>
-      <p:graphicFrame>
-        <p:nvGraphicFramePr>
-          <p:cNvPr id="4" name="Chart 0" descr=""/>
-          <p:cNvGraphicFramePr/>
-          <p:nvPr/>
-        </p:nvGraphicFramePr>
-        <p:xfrm>
-          <a:off x="548640" y="1783080"/>
-          <a:ext cx="6766560" cy="3931920"/>
-        </p:xfrm>
-        <a:graphic xmlns:a="http://schemas.openxmlformats.org/drawingml/2006/main">
-          <a:graphicData uri="http://schemas.openxmlformats.org/drawingml/2006/chart">
-            <c:chart xmlns:c="http://schemas.openxmlformats.org/drawingml/2006/chart" r:id="rId1"/>
-          </a:graphicData>
-        </a:graphic>
-      </p:graphicFrame>
-      <p:sp>
-        <p:nvSpPr>
-          <p:cNvPr id="5" name="Shape 2"/>
+      <p:sp>
+        <p:nvSpPr>
+          <p:cNvPr id="4" name="Shape 2"/>
           <p:cNvSpPr/>
           <p:nvPr/>
         </p:nvSpPr>
         <p:spPr>
           <a:xfrm>
-            <a:off x="7589520" y="1783080"/>
-            <a:ext cx="4023360" cy="3931920"/>
+            <a:off x="548640" y="1691640"/>
+            <a:ext cx="11064240" cy="1298448"/>
           </a:xfrm>
           <a:prstGeom prst="roundRect">
             <a:avLst>
-              <a:gd name="adj" fmla="val 1860"/>
+              <a:gd name="adj" fmla="val 5634"/>
             </a:avLst>
           </a:prstGeom>
           <a:solidFill>
-            <a:srgbClr val="EEF0EC"/>
+            <a:srgbClr val="E8F0EA"/>
           </a:solidFill>
           <a:ln/>
           <a:effectLst>
@@ -6628,30 +6345,69 @@
       </p:sp>
       <p:sp>
         <p:nvSpPr>
-          <p:cNvPr id="6" name="Text 3"/>
-          <p:cNvSpPr txBox="1"/>
-          <p:nvPr/>
-        </p:nvSpPr>
-        <p:spPr>
-          <a:xfrm>
-            <a:off x="7818120" y="2011680"/>
-            <a:ext cx="3566160" cy="822960"/>
-          </a:xfrm>
-          <a:prstGeom prst="rect">
-            <a:avLst/>
-          </a:prstGeom>
-          <a:noFill/>
-          <a:ln/>
-        </p:spPr>
-        <p:txBody>
-          <a:bodyPr wrap="square" lIns="0" tIns="0" rIns="0" bIns="0" rtlCol="0" anchor="ctr"/>
-          <a:lstStyle/>
-          <a:p>
-            <a:pPr indent="0" marL="0">
-              <a:buNone/>
-            </a:pPr>
-            <a:r>
-              <a:rPr lang="en-US" sz="4400" b="1" dirty="0">
+          <p:cNvPr id="5" name="Text 3"/>
+          <p:cNvSpPr txBox="1"/>
+          <p:nvPr/>
+        </p:nvSpPr>
+        <p:spPr>
+          <a:xfrm>
+            <a:off x="777240" y="1856232"/>
+            <a:ext cx="3566160" cy="960120"/>
+          </a:xfrm>
+          <a:prstGeom prst="rect">
+            <a:avLst/>
+          </a:prstGeom>
+          <a:noFill/>
+          <a:ln/>
+        </p:spPr>
+        <p:txBody>
+          <a:bodyPr wrap="square" lIns="0" tIns="0" rIns="0" bIns="0" rtlCol="0" anchor="ctr"/>
+          <a:lstStyle/>
+          <a:p>
+            <a:pPr indent="0" marL="0">
+              <a:buNone/>
+            </a:pPr>
+            <a:r>
+              <a:rPr lang="en-US" sz="1600" b="1" dirty="0">
+                <a:solidFill>
+                  <a:srgbClr val="1A1C1A"/>
+                </a:solidFill>
+                <a:latin typeface="Calibri" pitchFamily="34" charset="0"/>
+                <a:ea typeface="Calibri" pitchFamily="34" charset="-122"/>
+                <a:cs typeface="Calibri" pitchFamily="34" charset="-120"/>
+              </a:rPr>
+              <a:t>Enhanced Collagen 250g</a:t>
+            </a:r>
+            <a:endParaRPr lang="en-US" sz="1600" dirty="0"/>
+          </a:p>
+        </p:txBody>
+      </p:sp>
+      <p:sp>
+        <p:nvSpPr>
+          <p:cNvPr id="6" name="Text 4"/>
+          <p:cNvSpPr txBox="1"/>
+          <p:nvPr/>
+        </p:nvSpPr>
+        <p:spPr>
+          <a:xfrm>
+            <a:off x="4389120" y="1856232"/>
+            <a:ext cx="2651760" cy="960120"/>
+          </a:xfrm>
+          <a:prstGeom prst="rect">
+            <a:avLst/>
+          </a:prstGeom>
+          <a:noFill/>
+          <a:ln/>
+        </p:spPr>
+        <p:txBody>
+          <a:bodyPr wrap="square" lIns="0" tIns="0" rIns="0" bIns="0" rtlCol="0" anchor="ctr"/>
+          <a:lstStyle/>
+          <a:p>
+            <a:pPr indent="0" marL="0">
+              <a:buNone/>
+            </a:pPr>
+            <a:r>
+              <a:rPr lang="en-US" sz="2600" b="1" dirty="0">
                 <a:solidFill>
                   <a:srgbClr val="1F4D3A"/>
                 </a:solidFill>
@@ -6659,38 +6415,38 @@
                 <a:ea typeface="Cambria" pitchFamily="34" charset="-122"/>
                 <a:cs typeface="Cambria" pitchFamily="34" charset="-120"/>
               </a:rPr>
-              <a:t>2.4×</a:t>
-            </a:r>
-            <a:endParaRPr lang="en-US" sz="4400" dirty="0"/>
-          </a:p>
-        </p:txBody>
-      </p:sp>
-      <p:sp>
-        <p:nvSpPr>
-          <p:cNvPr id="7" name="Text 4"/>
-          <p:cNvSpPr txBox="1"/>
-          <p:nvPr/>
-        </p:nvSpPr>
-        <p:spPr>
-          <a:xfrm>
-            <a:off x="7818120" y="2880360"/>
-            <a:ext cx="3566160" cy="1188720"/>
-          </a:xfrm>
-          <a:prstGeom prst="rect">
-            <a:avLst/>
-          </a:prstGeom>
-          <a:noFill/>
-          <a:ln/>
-        </p:spPr>
-        <p:txBody>
-          <a:bodyPr wrap="square" lIns="0" tIns="0" rIns="0" bIns="0" rtlCol="0" anchor="ctr"/>
-          <a:lstStyle/>
-          <a:p>
-            <a:pPr indent="0" marL="0">
-              <a:buNone/>
-            </a:pPr>
-            <a:r>
-              <a:rPr lang="en-US" sz="1300" dirty="0">
+              <a:t>VND 650–700k</a:t>
+            </a:r>
+            <a:endParaRPr lang="en-US" sz="2600" dirty="0"/>
+          </a:p>
+        </p:txBody>
+      </p:sp>
+      <p:sp>
+        <p:nvSpPr>
+          <p:cNvPr id="7" name="Text 5"/>
+          <p:cNvSpPr txBox="1"/>
+          <p:nvPr/>
+        </p:nvSpPr>
+        <p:spPr>
+          <a:xfrm>
+            <a:off x="7132320" y="1819656"/>
+            <a:ext cx="4297680" cy="640080"/>
+          </a:xfrm>
+          <a:prstGeom prst="rect">
+            <a:avLst/>
+          </a:prstGeom>
+          <a:noFill/>
+          <a:ln/>
+        </p:spPr>
+        <p:txBody>
+          <a:bodyPr wrap="square" lIns="0" tIns="0" rIns="0" bIns="0" rtlCol="0" anchor="ctr"/>
+          <a:lstStyle/>
+          <a:p>
+            <a:pPr indent="0" marL="0">
+              <a:buNone/>
+            </a:pPr>
+            <a:r>
+              <a:rPr lang="en-US" sz="1200" dirty="0">
                 <a:solidFill>
                   <a:srgbClr val="5C635C"/>
                 </a:solidFill>
@@ -6698,38 +6454,38 @@
                 <a:ea typeface="Calibri" pitchFamily="34" charset="-122"/>
                 <a:cs typeface="Calibri" pitchFamily="34" charset="-120"/>
               </a:rPr>
-              <a:t>FOB-to-shelf multiple — inside the VND 650–850k premium collagen band, with headroom to price up</a:t>
-            </a:r>
-            <a:endParaRPr lang="en-US" sz="1300" dirty="0"/>
-          </a:p>
-        </p:txBody>
-      </p:sp>
-      <p:sp>
-        <p:nvSpPr>
-          <p:cNvPr id="8" name="Text 5"/>
-          <p:cNvSpPr txBox="1"/>
-          <p:nvPr/>
-        </p:nvSpPr>
-        <p:spPr>
-          <a:xfrm>
-            <a:off x="7818120" y="4937760"/>
-            <a:ext cx="3566160" cy="640080"/>
-          </a:xfrm>
-          <a:prstGeom prst="rect">
-            <a:avLst/>
-          </a:prstGeom>
-          <a:noFill/>
-          <a:ln/>
-        </p:spPr>
-        <p:txBody>
-          <a:bodyPr wrap="square" lIns="0" tIns="0" rIns="0" bIns="0" rtlCol="0" anchor="ctr"/>
-          <a:lstStyle/>
-          <a:p>
-            <a:pPr indent="0" marL="0">
-              <a:buNone/>
-            </a:pPr>
-            <a:r>
-              <a:rPr lang="en-US" sz="1100" i="1" dirty="0">
+              <a:t>Japanese and Korean premium collagen sells at VND 650–850k</a:t>
+            </a:r>
+            <a:endParaRPr lang="en-US" sz="1200" dirty="0"/>
+          </a:p>
+        </p:txBody>
+      </p:sp>
+      <p:sp>
+        <p:nvSpPr>
+          <p:cNvPr id="8" name="Text 6"/>
+          <p:cNvSpPr txBox="1"/>
+          <p:nvPr/>
+        </p:nvSpPr>
+        <p:spPr>
+          <a:xfrm>
+            <a:off x="7132320" y="2459736"/>
+            <a:ext cx="4297680" cy="384048"/>
+          </a:xfrm>
+          <a:prstGeom prst="rect">
+            <a:avLst/>
+          </a:prstGeom>
+          <a:noFill/>
+          <a:ln/>
+        </p:spPr>
+        <p:txBody>
+          <a:bodyPr wrap="square" lIns="0" tIns="0" rIns="0" bIns="0" rtlCol="0" anchor="ctr"/>
+          <a:lstStyle/>
+          <a:p>
+            <a:pPr indent="0" marL="0">
+              <a:buNone/>
+            </a:pPr>
+            <a:r>
+              <a:rPr lang="en-US" sz="1200" b="1" dirty="0">
                 <a:solidFill>
                   <a:srgbClr val="C56A45"/>
                 </a:solidFill>
@@ -6737,15 +6493,424 @@
                 <a:ea typeface="Calibri" pitchFamily="34" charset="-122"/>
                 <a:cs typeface="Calibri" pitchFamily="34" charset="-120"/>
               </a:rPr>
-              <a:t>A live calculator and a full SKU model accompany this deck.</a:t>
-            </a:r>
-            <a:endParaRPr lang="en-US" sz="1100" dirty="0"/>
-          </a:p>
-        </p:txBody>
-      </p:sp>
-      <p:sp>
-        <p:nvSpPr>
-          <p:cNvPr id="9" name="Text 6"/>
+              <a:t>Entry point of the premium band</a:t>
+            </a:r>
+            <a:endParaRPr lang="en-US" sz="1200" dirty="0"/>
+          </a:p>
+        </p:txBody>
+      </p:sp>
+      <p:sp>
+        <p:nvSpPr>
+          <p:cNvPr id="9" name="Shape 7"/>
+          <p:cNvSpPr/>
+          <p:nvPr/>
+        </p:nvSpPr>
+        <p:spPr>
+          <a:xfrm>
+            <a:off x="548640" y="3154680"/>
+            <a:ext cx="11064240" cy="1298448"/>
+          </a:xfrm>
+          <a:prstGeom prst="roundRect">
+            <a:avLst>
+              <a:gd name="adj" fmla="val 5634"/>
+            </a:avLst>
+          </a:prstGeom>
+          <a:solidFill>
+            <a:srgbClr val="EEF0EC"/>
+          </a:solidFill>
+          <a:ln/>
+          <a:effectLst>
+            <a:outerShdw sx="100000" sy="100000" kx="0" ky="0" algn="bl" rotWithShape="0" blurRad="63500" dist="25400" dir="5400000">
+              <a:srgbClr val="BBBBBB">
+                <a:alpha val="35000"/>
+              </a:srgbClr>
+            </a:outerShdw>
+          </a:effectLst>
+        </p:spPr>
+      </p:sp>
+      <p:sp>
+        <p:nvSpPr>
+          <p:cNvPr id="10" name="Text 8"/>
+          <p:cNvSpPr txBox="1"/>
+          <p:nvPr/>
+        </p:nvSpPr>
+        <p:spPr>
+          <a:xfrm>
+            <a:off x="777240" y="3319272"/>
+            <a:ext cx="3566160" cy="960120"/>
+          </a:xfrm>
+          <a:prstGeom prst="rect">
+            <a:avLst/>
+          </a:prstGeom>
+          <a:noFill/>
+          <a:ln/>
+        </p:spPr>
+        <p:txBody>
+          <a:bodyPr wrap="square" lIns="0" tIns="0" rIns="0" bIns="0" rtlCol="0" anchor="ctr"/>
+          <a:lstStyle/>
+          <a:p>
+            <a:pPr indent="0" marL="0">
+              <a:buNone/>
+            </a:pPr>
+            <a:r>
+              <a:rPr lang="en-US" sz="1600" b="1" dirty="0">
+                <a:solidFill>
+                  <a:srgbClr val="1A1C1A"/>
+                </a:solidFill>
+                <a:latin typeface="Calibri" pitchFamily="34" charset="0"/>
+                <a:ea typeface="Calibri" pitchFamily="34" charset="-122"/>
+                <a:cs typeface="Calibri" pitchFamily="34" charset="-120"/>
+              </a:rPr>
+              <a:t>Magnesium bisglycinate, Vietnam pack</a:t>
+            </a:r>
+            <a:endParaRPr lang="en-US" sz="1600" dirty="0"/>
+          </a:p>
+        </p:txBody>
+      </p:sp>
+      <p:sp>
+        <p:nvSpPr>
+          <p:cNvPr id="11" name="Text 9"/>
+          <p:cNvSpPr txBox="1"/>
+          <p:nvPr/>
+        </p:nvSpPr>
+        <p:spPr>
+          <a:xfrm>
+            <a:off x="4389120" y="3319272"/>
+            <a:ext cx="2651760" cy="960120"/>
+          </a:xfrm>
+          <a:prstGeom prst="rect">
+            <a:avLst/>
+          </a:prstGeom>
+          <a:noFill/>
+          <a:ln/>
+        </p:spPr>
+        <p:txBody>
+          <a:bodyPr wrap="square" lIns="0" tIns="0" rIns="0" bIns="0" rtlCol="0" anchor="ctr"/>
+          <a:lstStyle/>
+          <a:p>
+            <a:pPr indent="0" marL="0">
+              <a:buNone/>
+            </a:pPr>
+            <a:r>
+              <a:rPr lang="en-US" sz="2600" b="1" dirty="0">
+                <a:solidFill>
+                  <a:srgbClr val="1F4D3A"/>
+                </a:solidFill>
+                <a:latin typeface="Cambria" pitchFamily="34" charset="0"/>
+                <a:ea typeface="Cambria" pitchFamily="34" charset="-122"/>
+                <a:cs typeface="Cambria" pitchFamily="34" charset="-120"/>
+              </a:rPr>
+              <a:t>VND 300–400k</a:t>
+            </a:r>
+            <a:endParaRPr lang="en-US" sz="2600" dirty="0"/>
+          </a:p>
+        </p:txBody>
+      </p:sp>
+      <p:sp>
+        <p:nvSpPr>
+          <p:cNvPr id="12" name="Text 10"/>
+          <p:cNvSpPr txBox="1"/>
+          <p:nvPr/>
+        </p:nvSpPr>
+        <p:spPr>
+          <a:xfrm>
+            <a:off x="7132320" y="3282696"/>
+            <a:ext cx="4297680" cy="640080"/>
+          </a:xfrm>
+          <a:prstGeom prst="rect">
+            <a:avLst/>
+          </a:prstGeom>
+          <a:noFill/>
+          <a:ln/>
+        </p:spPr>
+        <p:txBody>
+          <a:bodyPr wrap="square" lIns="0" tIns="0" rIns="0" bIns="0" rtlCol="0" anchor="ctr"/>
+          <a:lstStyle/>
+          <a:p>
+            <a:pPr indent="0" marL="0">
+              <a:buNone/>
+            </a:pPr>
+            <a:r>
+              <a:rPr lang="en-US" sz="1200" dirty="0">
+                <a:solidFill>
+                  <a:srgbClr val="5C635C"/>
+                </a:solidFill>
+                <a:latin typeface="Calibri" pitchFamily="34" charset="0"/>
+                <a:ea typeface="Calibri" pitchFamily="34" charset="-122"/>
+                <a:cs typeface="Calibri" pitchFamily="34" charset="-120"/>
+              </a:rPr>
+              <a:t>Doppelherz magnesium from VND 220k; Blackmores Bio Magnesium near VND 500k</a:t>
+            </a:r>
+            <a:endParaRPr lang="en-US" sz="1200" dirty="0"/>
+          </a:p>
+        </p:txBody>
+      </p:sp>
+      <p:sp>
+        <p:nvSpPr>
+          <p:cNvPr id="13" name="Text 11"/>
+          <p:cNvSpPr txBox="1"/>
+          <p:nvPr/>
+        </p:nvSpPr>
+        <p:spPr>
+          <a:xfrm>
+            <a:off x="7132320" y="3922776"/>
+            <a:ext cx="4297680" cy="384048"/>
+          </a:xfrm>
+          <a:prstGeom prst="rect">
+            <a:avLst/>
+          </a:prstGeom>
+          <a:noFill/>
+          <a:ln/>
+        </p:spPr>
+        <p:txBody>
+          <a:bodyPr wrap="square" lIns="0" tIns="0" rIns="0" bIns="0" rtlCol="0" anchor="ctr"/>
+          <a:lstStyle/>
+          <a:p>
+            <a:pPr indent="0" marL="0">
+              <a:buNone/>
+            </a:pPr>
+            <a:r>
+              <a:rPr lang="en-US" sz="1200" b="1" dirty="0">
+                <a:solidFill>
+                  <a:srgbClr val="C56A45"/>
+                </a:solidFill>
+                <a:latin typeface="Calibri" pitchFamily="34" charset="0"/>
+                <a:ea typeface="Calibri" pitchFamily="34" charset="-122"/>
+                <a:cs typeface="Calibri" pitchFamily="34" charset="-120"/>
+              </a:rPr>
+              <a:t>Premium, inside the band</a:t>
+            </a:r>
+            <a:endParaRPr lang="en-US" sz="1200" dirty="0"/>
+          </a:p>
+        </p:txBody>
+      </p:sp>
+      <p:sp>
+        <p:nvSpPr>
+          <p:cNvPr id="14" name="Shape 12"/>
+          <p:cNvSpPr/>
+          <p:nvPr/>
+        </p:nvSpPr>
+        <p:spPr>
+          <a:xfrm>
+            <a:off x="548640" y="4617720"/>
+            <a:ext cx="11064240" cy="1298448"/>
+          </a:xfrm>
+          <a:prstGeom prst="roundRect">
+            <a:avLst>
+              <a:gd name="adj" fmla="val 5634"/>
+            </a:avLst>
+          </a:prstGeom>
+          <a:solidFill>
+            <a:srgbClr val="EEF0EC"/>
+          </a:solidFill>
+          <a:ln/>
+          <a:effectLst>
+            <a:outerShdw sx="100000" sy="100000" kx="0" ky="0" algn="bl" rotWithShape="0" blurRad="63500" dist="25400" dir="5400000">
+              <a:srgbClr val="BBBBBB">
+                <a:alpha val="35000"/>
+              </a:srgbClr>
+            </a:outerShdw>
+          </a:effectLst>
+        </p:spPr>
+      </p:sp>
+      <p:sp>
+        <p:nvSpPr>
+          <p:cNvPr id="15" name="Text 13"/>
+          <p:cNvSpPr txBox="1"/>
+          <p:nvPr/>
+        </p:nvSpPr>
+        <p:spPr>
+          <a:xfrm>
+            <a:off x="777240" y="4782312"/>
+            <a:ext cx="3566160" cy="960120"/>
+          </a:xfrm>
+          <a:prstGeom prst="rect">
+            <a:avLst/>
+          </a:prstGeom>
+          <a:noFill/>
+          <a:ln/>
+        </p:spPr>
+        <p:txBody>
+          <a:bodyPr wrap="square" lIns="0" tIns="0" rIns="0" bIns="0" rtlCol="0" anchor="ctr"/>
+          <a:lstStyle/>
+          <a:p>
+            <a:pPr indent="0" marL="0">
+              <a:buNone/>
+            </a:pPr>
+            <a:r>
+              <a:rPr lang="en-US" sz="1600" b="1" dirty="0">
+                <a:solidFill>
+                  <a:srgbClr val="1A1C1A"/>
+                </a:solidFill>
+                <a:latin typeface="Calibri" pitchFamily="34" charset="0"/>
+                <a:ea typeface="Calibri" pitchFamily="34" charset="-122"/>
+                <a:cs typeface="Calibri" pitchFamily="34" charset="-120"/>
+              </a:rPr>
+              <a:t>Greens, smaller format</a:t>
+            </a:r>
+            <a:endParaRPr lang="en-US" sz="1600" dirty="0"/>
+          </a:p>
+        </p:txBody>
+      </p:sp>
+      <p:sp>
+        <p:nvSpPr>
+          <p:cNvPr id="16" name="Text 14"/>
+          <p:cNvSpPr txBox="1"/>
+          <p:nvPr/>
+        </p:nvSpPr>
+        <p:spPr>
+          <a:xfrm>
+            <a:off x="4389120" y="4782312"/>
+            <a:ext cx="2651760" cy="960120"/>
+          </a:xfrm>
+          <a:prstGeom prst="rect">
+            <a:avLst/>
+          </a:prstGeom>
+          <a:noFill/>
+          <a:ln/>
+        </p:spPr>
+        <p:txBody>
+          <a:bodyPr wrap="square" lIns="0" tIns="0" rIns="0" bIns="0" rtlCol="0" anchor="ctr"/>
+          <a:lstStyle/>
+          <a:p>
+            <a:pPr indent="0" marL="0">
+              <a:buNone/>
+            </a:pPr>
+            <a:r>
+              <a:rPr lang="en-US" sz="2600" b="1" dirty="0">
+                <a:solidFill>
+                  <a:srgbClr val="1F4D3A"/>
+                </a:solidFill>
+                <a:latin typeface="Cambria" pitchFamily="34" charset="0"/>
+                <a:ea typeface="Cambria" pitchFamily="34" charset="-122"/>
+                <a:cs typeface="Cambria" pitchFamily="34" charset="-120"/>
+              </a:rPr>
+              <a:t>VND 450–550k</a:t>
+            </a:r>
+            <a:endParaRPr lang="en-US" sz="2600" dirty="0"/>
+          </a:p>
+        </p:txBody>
+      </p:sp>
+      <p:sp>
+        <p:nvSpPr>
+          <p:cNvPr id="17" name="Text 15"/>
+          <p:cNvSpPr txBox="1"/>
+          <p:nvPr/>
+        </p:nvSpPr>
+        <p:spPr>
+          <a:xfrm>
+            <a:off x="7132320" y="4745736"/>
+            <a:ext cx="4297680" cy="640080"/>
+          </a:xfrm>
+          <a:prstGeom prst="rect">
+            <a:avLst/>
+          </a:prstGeom>
+          <a:noFill/>
+          <a:ln/>
+        </p:spPr>
+        <p:txBody>
+          <a:bodyPr wrap="square" lIns="0" tIns="0" rIns="0" bIns="0" rtlCol="0" anchor="ctr"/>
+          <a:lstStyle/>
+          <a:p>
+            <a:pPr indent="0" marL="0">
+              <a:buNone/>
+            </a:pPr>
+            <a:r>
+              <a:rPr lang="en-US" sz="1200" dirty="0">
+                <a:solidFill>
+                  <a:srgbClr val="5C635C"/>
+                </a:solidFill>
+                <a:latin typeface="Calibri" pitchFamily="34" charset="0"/>
+                <a:ea typeface="Calibri" pitchFamily="34" charset="-122"/>
+                <a:cs typeface="Calibri" pitchFamily="34" charset="-120"/>
+              </a:rPr>
+              <a:t>Orihiro aojiru greens VND 350–470k</a:t>
+            </a:r>
+            <a:endParaRPr lang="en-US" sz="1200" dirty="0"/>
+          </a:p>
+        </p:txBody>
+      </p:sp>
+      <p:sp>
+        <p:nvSpPr>
+          <p:cNvPr id="18" name="Text 16"/>
+          <p:cNvSpPr txBox="1"/>
+          <p:nvPr/>
+        </p:nvSpPr>
+        <p:spPr>
+          <a:xfrm>
+            <a:off x="7132320" y="5385816"/>
+            <a:ext cx="4297680" cy="384048"/>
+          </a:xfrm>
+          <a:prstGeom prst="rect">
+            <a:avLst/>
+          </a:prstGeom>
+          <a:noFill/>
+          <a:ln/>
+        </p:spPr>
+        <p:txBody>
+          <a:bodyPr wrap="square" lIns="0" tIns="0" rIns="0" bIns="0" rtlCol="0" anchor="ctr"/>
+          <a:lstStyle/>
+          <a:p>
+            <a:pPr indent="0" marL="0">
+              <a:buNone/>
+            </a:pPr>
+            <a:r>
+              <a:rPr lang="en-US" sz="1200" b="1" dirty="0">
+                <a:solidFill>
+                  <a:srgbClr val="C56A45"/>
+                </a:solidFill>
+                <a:latin typeface="Calibri" pitchFamily="34" charset="0"/>
+                <a:ea typeface="Calibri" pitchFamily="34" charset="-122"/>
+                <a:cs typeface="Calibri" pitchFamily="34" charset="-120"/>
+              </a:rPr>
+              <a:t>Premium, inside the band</a:t>
+            </a:r>
+            <a:endParaRPr lang="en-US" sz="1200" dirty="0"/>
+          </a:p>
+        </p:txBody>
+      </p:sp>
+      <p:sp>
+        <p:nvSpPr>
+          <p:cNvPr id="19" name="Text 17"/>
+          <p:cNvSpPr txBox="1"/>
+          <p:nvPr/>
+        </p:nvSpPr>
+        <p:spPr>
+          <a:xfrm>
+            <a:off x="548640" y="6080760"/>
+            <a:ext cx="11064240" cy="274320"/>
+          </a:xfrm>
+          <a:prstGeom prst="rect">
+            <a:avLst/>
+          </a:prstGeom>
+          <a:noFill/>
+          <a:ln/>
+        </p:spPr>
+        <p:txBody>
+          <a:bodyPr wrap="square" lIns="0" tIns="0" rIns="0" bIns="0" rtlCol="0" anchor="ctr"/>
+          <a:lstStyle/>
+          <a:p>
+            <a:pPr indent="0" marL="0">
+              <a:buNone/>
+            </a:pPr>
+            <a:r>
+              <a:rPr lang="en-US" sz="900" dirty="0">
+                <a:solidFill>
+                  <a:srgbClr val="5C635C"/>
+                </a:solidFill>
+                <a:latin typeface="Calibri" pitchFamily="34" charset="0"/>
+                <a:ea typeface="Calibri" pitchFamily="34" charset="-122"/>
+                <a:cs typeface="Calibri" pitchFamily="34" charset="-120"/>
+              </a:rPr>
+              <a:t>Competitor prices: Vietnamese retail and pharmacy listings, 2025 to 2026.</a:t>
+            </a:r>
+            <a:endParaRPr lang="en-US" sz="900" dirty="0"/>
+          </a:p>
+        </p:txBody>
+      </p:sp>
+      <p:sp>
+        <p:nvSpPr>
+          <p:cNvPr id="20" name="Text 18"/>
           <p:cNvSpPr txBox="1"/>
           <p:nvPr/>
         </p:nvSpPr>
@@ -6784,7 +6949,7 @@
       </p:sp>
       <p:sp>
         <p:nvSpPr>
-          <p:cNvPr id="10" name="Text 7"/>
+          <p:cNvPr id="21" name="Text 19"/>
           <p:cNvSpPr txBox="1"/>
           <p:nvPr/>
         </p:nvSpPr>
@@ -6886,7 +7051,7 @@
                 <a:ea typeface="Cambria" pitchFamily="34" charset="-122"/>
                 <a:cs typeface="Cambria" pitchFamily="34" charset="-120"/>
               </a:rPr>
-              <a:t>The plan: a 12-month runway to the first Tet</a:t>
+              <a:t>The plan: twelve months to the first Tet</a:t>
             </a:r>
             <a:endParaRPr lang="en-US" sz="3000" dirty="0"/>
           </a:p>
@@ -6982,8 +7147,8 @@
         </p:nvSpPr>
         <p:spPr>
           <a:xfrm>
-            <a:off x="640080" y="3291840"/>
-            <a:ext cx="2057400" cy="365760"/>
+            <a:off x="594360" y="3291840"/>
+            <a:ext cx="2148840" cy="365760"/>
           </a:xfrm>
           <a:prstGeom prst="rect">
             <a:avLst/>
@@ -6999,7 +7164,7 @@
               <a:buNone/>
             </a:pPr>
             <a:r>
-              <a:rPr lang="en-US" sz="1300" b="1" dirty="0">
+              <a:rPr lang="en-US" sz="1250" b="1" dirty="0">
                 <a:solidFill>
                   <a:srgbClr val="1F4D3A"/>
                 </a:solidFill>
@@ -7007,9 +7172,9 @@
                 <a:ea typeface="Calibri" pitchFamily="34" charset="-122"/>
                 <a:cs typeface="Calibri" pitchFamily="34" charset="-120"/>
               </a:rPr>
-              <a:t>Now – Sep</a:t>
-            </a:r>
-            <a:endParaRPr lang="en-US" sz="1300" dirty="0"/>
+              <a:t>Nov to Dec 2026</a:t>
+            </a:r>
+            <a:endParaRPr lang="en-US" sz="1250" dirty="0"/>
           </a:p>
         </p:txBody>
       </p:sp>
@@ -7021,8 +7186,8 @@
         </p:nvSpPr>
         <p:spPr>
           <a:xfrm>
-            <a:off x="640080" y="3657600"/>
-            <a:ext cx="2057400" cy="1005840"/>
+            <a:off x="640080" y="3703320"/>
+            <a:ext cx="2057400" cy="1097280"/>
           </a:xfrm>
           <a:prstGeom prst="rect">
             <a:avLst/>
@@ -7046,7 +7211,7 @@
                 <a:ea typeface="Calibri" pitchFamily="34" charset="-122"/>
                 <a:cs typeface="Calibri" pitchFamily="34" charset="-120"/>
               </a:rPr>
-              <a:t>Audit, IP filings, dossier assembly</a:t>
+              <a:t>Agree the partner plan, file trademarks, start dossiers</a:t>
             </a:r>
             <a:endParaRPr lang="en-US" sz="1150" dirty="0"/>
           </a:p>
@@ -7142,8 +7307,8 @@
         </p:nvSpPr>
         <p:spPr>
           <a:xfrm>
-            <a:off x="2880360" y="3291840"/>
-            <a:ext cx="2057400" cy="365760"/>
+            <a:off x="2834640" y="3291840"/>
+            <a:ext cx="2148840" cy="365760"/>
           </a:xfrm>
           <a:prstGeom prst="rect">
             <a:avLst/>
@@ -7159,7 +7324,7 @@
               <a:buNone/>
             </a:pPr>
             <a:r>
-              <a:rPr lang="en-US" sz="1300" b="1" dirty="0">
+              <a:rPr lang="en-US" sz="1250" b="1" dirty="0">
                 <a:solidFill>
                   <a:srgbClr val="1F4D3A"/>
                 </a:solidFill>
@@ -7167,9 +7332,9 @@
                 <a:ea typeface="Calibri" pitchFamily="34" charset="-122"/>
                 <a:cs typeface="Calibri" pitchFamily="34" charset="-120"/>
               </a:rPr>
-              <a:t>Sep – Jan</a:t>
-            </a:r>
-            <a:endParaRPr lang="en-US" sz="1300" dirty="0"/>
+              <a:t>Dec 2026 to Mar 2027</a:t>
+            </a:r>
+            <a:endParaRPr lang="en-US" sz="1250" dirty="0"/>
           </a:p>
         </p:txBody>
       </p:sp>
@@ -7181,8 +7346,8 @@
         </p:nvSpPr>
         <p:spPr>
           <a:xfrm>
-            <a:off x="2880360" y="3657600"/>
-            <a:ext cx="2057400" cy="1005840"/>
+            <a:off x="2880360" y="3703320"/>
+            <a:ext cx="2057400" cy="1097280"/>
           </a:xfrm>
           <a:prstGeom prst="rect">
             <a:avLst/>
@@ -7206,7 +7371,7 @@
                 <a:ea typeface="Calibri" pitchFamily="34" charset="-122"/>
                 <a:cs typeface="Calibri" pitchFamily="34" charset="-120"/>
               </a:rPr>
-              <a:t>File registrations; build Mall stores</a:t>
+              <a:t>File registrations; confirm the rules under the new food safety law</a:t>
             </a:r>
             <a:endParaRPr lang="en-US" sz="1150" dirty="0"/>
           </a:p>
@@ -7302,8 +7467,8 @@
         </p:nvSpPr>
         <p:spPr>
           <a:xfrm>
-            <a:off x="5120640" y="3291840"/>
-            <a:ext cx="2057400" cy="365760"/>
+            <a:off x="5074920" y="3291840"/>
+            <a:ext cx="2148840" cy="365760"/>
           </a:xfrm>
           <a:prstGeom prst="rect">
             <a:avLst/>
@@ -7319,7 +7484,7 @@
               <a:buNone/>
             </a:pPr>
             <a:r>
-              <a:rPr lang="en-US" sz="1300" b="1" dirty="0">
+              <a:rPr lang="en-US" sz="1250" b="1" dirty="0">
                 <a:solidFill>
                   <a:srgbClr val="1F4D3A"/>
                 </a:solidFill>
@@ -7327,9 +7492,9 @@
                 <a:ea typeface="Calibri" pitchFamily="34" charset="-122"/>
                 <a:cs typeface="Calibri" pitchFamily="34" charset="-120"/>
               </a:rPr>
-              <a:t>Feb – Apr</a:t>
-            </a:r>
-            <a:endParaRPr lang="en-US" sz="1300" dirty="0"/>
+              <a:t>Apr to Jun 2027</a:t>
+            </a:r>
+            <a:endParaRPr lang="en-US" sz="1250" dirty="0"/>
           </a:p>
         </p:txBody>
       </p:sp>
@@ -7341,8 +7506,8 @@
         </p:nvSpPr>
         <p:spPr>
           <a:xfrm>
-            <a:off x="5120640" y="3657600"/>
-            <a:ext cx="2057400" cy="1005840"/>
+            <a:off x="5120640" y="3703320"/>
+            <a:ext cx="2057400" cy="1097280"/>
           </a:xfrm>
           <a:prstGeom prst="rect">
             <a:avLst/>
@@ -7366,7 +7531,7 @@
                 <a:ea typeface="Calibri" pitchFamily="34" charset="-122"/>
                 <a:cs typeface="Calibri" pitchFamily="34" charset="-120"/>
               </a:rPr>
-              <a:t>Soft launch online after Tet; gather velocity</a:t>
+              <a:t>Official stores live; online launch; first sales data</a:t>
             </a:r>
             <a:endParaRPr lang="en-US" sz="1150" dirty="0"/>
           </a:p>
@@ -7462,8 +7627,8 @@
         </p:nvSpPr>
         <p:spPr>
           <a:xfrm>
-            <a:off x="7360920" y="3291840"/>
-            <a:ext cx="2057400" cy="365760"/>
+            <a:off x="7315200" y="3291840"/>
+            <a:ext cx="2148840" cy="365760"/>
           </a:xfrm>
           <a:prstGeom prst="rect">
             <a:avLst/>
@@ -7479,7 +7644,7 @@
               <a:buNone/>
             </a:pPr>
             <a:r>
-              <a:rPr lang="en-US" sz="1300" b="1" dirty="0">
+              <a:rPr lang="en-US" sz="1250" b="1" dirty="0">
                 <a:solidFill>
                   <a:srgbClr val="1F4D3A"/>
                 </a:solidFill>
@@ -7487,9 +7652,9 @@
                 <a:ea typeface="Calibri" pitchFamily="34" charset="-122"/>
                 <a:cs typeface="Calibri" pitchFamily="34" charset="-120"/>
               </a:rPr>
-              <a:t>Apr – Aug</a:t>
-            </a:r>
-            <a:endParaRPr lang="en-US" sz="1300" dirty="0"/>
+              <a:t>Jun to Aug 2027</a:t>
+            </a:r>
+            <a:endParaRPr lang="en-US" sz="1250" dirty="0"/>
           </a:p>
         </p:txBody>
       </p:sp>
@@ -7501,8 +7666,8 @@
         </p:nvSpPr>
         <p:spPr>
           <a:xfrm>
-            <a:off x="7360920" y="3657600"/>
-            <a:ext cx="2057400" cy="1005840"/>
+            <a:off x="7360920" y="3703320"/>
+            <a:ext cx="2057400" cy="1097280"/>
           </a:xfrm>
           <a:prstGeom prst="rect">
             <a:avLst/>
@@ -7526,7 +7691,7 @@
                 <a:ea typeface="Calibri" pitchFamily="34" charset="-122"/>
                 <a:cs typeface="Calibri" pitchFamily="34" charset="-120"/>
               </a:rPr>
-              <a:t>Long Chau &amp; Pharmacity listing push</a:t>
+              <a:t>Long Chau and Pharmacity listing push</a:t>
             </a:r>
             <a:endParaRPr lang="en-US" sz="1150" dirty="0"/>
           </a:p>
@@ -7599,8 +7764,8 @@
         </p:nvSpPr>
         <p:spPr>
           <a:xfrm>
-            <a:off x="9601200" y="3291840"/>
-            <a:ext cx="2057400" cy="365760"/>
+            <a:off x="9555480" y="3291840"/>
+            <a:ext cx="2148840" cy="365760"/>
           </a:xfrm>
           <a:prstGeom prst="rect">
             <a:avLst/>
@@ -7616,7 +7781,7 @@
               <a:buNone/>
             </a:pPr>
             <a:r>
-              <a:rPr lang="en-US" sz="1300" b="1" dirty="0">
+              <a:rPr lang="en-US" sz="1250" b="1" dirty="0">
                 <a:solidFill>
                   <a:srgbClr val="1F4D3A"/>
                 </a:solidFill>
@@ -7624,9 +7789,9 @@
                 <a:ea typeface="Calibri" pitchFamily="34" charset="-122"/>
                 <a:cs typeface="Calibri" pitchFamily="34" charset="-120"/>
               </a:rPr>
-              <a:t>Sep – Nov</a:t>
-            </a:r>
-            <a:endParaRPr lang="en-US" sz="1300" dirty="0"/>
+              <a:t>Sep to Nov 2027</a:t>
+            </a:r>
+            <a:endParaRPr lang="en-US" sz="1250" dirty="0"/>
           </a:p>
         </p:txBody>
       </p:sp>
@@ -7638,8 +7803,8 @@
         </p:nvSpPr>
         <p:spPr>
           <a:xfrm>
-            <a:off x="9601200" y="3657600"/>
-            <a:ext cx="2057400" cy="1005840"/>
+            <a:off x="9601200" y="3703320"/>
+            <a:ext cx="2057400" cy="1097280"/>
           </a:xfrm>
           <a:prstGeom prst="rect">
             <a:avLst/>
@@ -7663,7 +7828,7 @@
                 <a:ea typeface="Calibri" pitchFamily="34" charset="-122"/>
                 <a:cs typeface="Calibri" pitchFamily="34" charset="-120"/>
               </a:rPr>
-              <a:t>First Tet sell-in — gift SKU, chain displays</a:t>
+              <a:t>First Tet sell in: gift sets and chain displays</a:t>
             </a:r>
             <a:endParaRPr lang="en-US" sz="1150" dirty="0"/>
           </a:p>
@@ -7677,7 +7842,7 @@
         </p:nvSpPr>
         <p:spPr>
           <a:xfrm>
-            <a:off x="548640" y="5120640"/>
+            <a:off x="548640" y="5212080"/>
             <a:ext cx="11064240" cy="457200"/>
           </a:xfrm>
           <a:prstGeom prst="rect">
@@ -7702,7 +7867,7 @@
                 <a:ea typeface="Calibri" pitchFamily="34" charset="-122"/>
                 <a:cs typeface="Calibri" pitchFamily="34" charset="-120"/>
               </a:rPr>
-              <a:t>Tet 2027 falls on 6 February — the first full Tet play is Tet 2028, which sets this calendar.</a:t>
+              <a:t>Tet 2028 falls on 26 January, so the gift sell in runs September to November 2027.</a:t>
             </a:r>
             <a:endParaRPr lang="en-US" sz="1300" dirty="0"/>
           </a:p>

--- a/vietnam-distributor-pitch.pptx
+++ b/vietnam-distributor-pitch.pptx
@@ -7059,7 +7059,46 @@
       </p:sp>
       <p:sp>
         <p:nvSpPr>
-          <p:cNvPr id="3" name="Shape 1"/>
+          <p:cNvPr id="3" name="Text 1"/>
+          <p:cNvSpPr txBox="1"/>
+          <p:nvPr/>
+        </p:nvSpPr>
+        <p:spPr>
+          <a:xfrm>
+            <a:off x="566928" y="1024128"/>
+            <a:ext cx="11064240" cy="365760"/>
+          </a:xfrm>
+          <a:prstGeom prst="rect">
+            <a:avLst/>
+          </a:prstGeom>
+          <a:noFill/>
+          <a:ln/>
+        </p:spPr>
+        <p:txBody>
+          <a:bodyPr wrap="square" lIns="0" tIns="0" rIns="0" bIns="0" rtlCol="0" anchor="ctr"/>
+          <a:lstStyle/>
+          <a:p>
+            <a:pPr indent="0" marL="0">
+              <a:buNone/>
+            </a:pPr>
+            <a:r>
+              <a:rPr lang="en-US" sz="1300" i="1" dirty="0">
+                <a:solidFill>
+                  <a:srgbClr val="C56A45"/>
+                </a:solidFill>
+                <a:latin typeface="Calibri" pitchFamily="34" charset="0"/>
+                <a:ea typeface="Calibri" pitchFamily="34" charset="-122"/>
+                <a:cs typeface="Calibri" pitchFamily="34" charset="-120"/>
+              </a:rPr>
+              <a:t>Target timeline; registration approvals set the pace</a:t>
+            </a:r>
+            <a:endParaRPr lang="en-US" sz="1300" dirty="0"/>
+          </a:p>
+        </p:txBody>
+      </p:sp>
+      <p:sp>
+        <p:nvSpPr>
+          <p:cNvPr id="4" name="Shape 2"/>
           <p:cNvSpPr/>
           <p:nvPr/>
         </p:nvSpPr>
@@ -7079,7 +7118,7 @@
       </p:sp>
       <p:sp>
         <p:nvSpPr>
-          <p:cNvPr id="4" name="Text 2"/>
+          <p:cNvPr id="5" name="Text 3"/>
           <p:cNvSpPr txBox="1"/>
           <p:nvPr/>
         </p:nvSpPr>
@@ -7118,7 +7157,7 @@
       </p:sp>
       <p:sp>
         <p:nvSpPr>
-          <p:cNvPr id="5" name="Shape 3"/>
+          <p:cNvPr id="6" name="Shape 4"/>
           <p:cNvSpPr/>
           <p:nvPr/>
         </p:nvSpPr>
@@ -7141,7 +7180,7 @@
       </p:sp>
       <p:sp>
         <p:nvSpPr>
-          <p:cNvPr id="6" name="Text 4"/>
+          <p:cNvPr id="7" name="Text 5"/>
           <p:cNvSpPr txBox="1"/>
           <p:nvPr/>
         </p:nvSpPr>
@@ -7180,7 +7219,7 @@
       </p:sp>
       <p:sp>
         <p:nvSpPr>
-          <p:cNvPr id="7" name="Text 5"/>
+          <p:cNvPr id="8" name="Text 6"/>
           <p:cNvSpPr txBox="1"/>
           <p:nvPr/>
         </p:nvSpPr>
@@ -7219,7 +7258,7 @@
       </p:sp>
       <p:sp>
         <p:nvSpPr>
-          <p:cNvPr id="8" name="Shape 6"/>
+          <p:cNvPr id="9" name="Shape 7"/>
           <p:cNvSpPr/>
           <p:nvPr/>
         </p:nvSpPr>
@@ -7239,7 +7278,7 @@
       </p:sp>
       <p:sp>
         <p:nvSpPr>
-          <p:cNvPr id="9" name="Text 7"/>
+          <p:cNvPr id="10" name="Text 8"/>
           <p:cNvSpPr txBox="1"/>
           <p:nvPr/>
         </p:nvSpPr>
@@ -7278,7 +7317,7 @@
       </p:sp>
       <p:sp>
         <p:nvSpPr>
-          <p:cNvPr id="10" name="Shape 8"/>
+          <p:cNvPr id="11" name="Shape 9"/>
           <p:cNvSpPr/>
           <p:nvPr/>
         </p:nvSpPr>
@@ -7301,7 +7340,7 @@
       </p:sp>
       <p:sp>
         <p:nvSpPr>
-          <p:cNvPr id="11" name="Text 9"/>
+          <p:cNvPr id="12" name="Text 10"/>
           <p:cNvSpPr txBox="1"/>
           <p:nvPr/>
         </p:nvSpPr>
@@ -7340,7 +7379,7 @@
       </p:sp>
       <p:sp>
         <p:nvSpPr>
-          <p:cNvPr id="12" name="Text 10"/>
+          <p:cNvPr id="13" name="Text 11"/>
           <p:cNvSpPr txBox="1"/>
           <p:nvPr/>
         </p:nvSpPr>
@@ -7379,7 +7418,7 @@
       </p:sp>
       <p:sp>
         <p:nvSpPr>
-          <p:cNvPr id="13" name="Shape 11"/>
+          <p:cNvPr id="14" name="Shape 12"/>
           <p:cNvSpPr/>
           <p:nvPr/>
         </p:nvSpPr>
@@ -7399,7 +7438,7 @@
       </p:sp>
       <p:sp>
         <p:nvSpPr>
-          <p:cNvPr id="14" name="Text 12"/>
+          <p:cNvPr id="15" name="Text 13"/>
           <p:cNvSpPr txBox="1"/>
           <p:nvPr/>
         </p:nvSpPr>
@@ -7438,7 +7477,7 @@
       </p:sp>
       <p:sp>
         <p:nvSpPr>
-          <p:cNvPr id="15" name="Shape 13"/>
+          <p:cNvPr id="16" name="Shape 14"/>
           <p:cNvSpPr/>
           <p:nvPr/>
         </p:nvSpPr>
@@ -7461,7 +7500,7 @@
       </p:sp>
       <p:sp>
         <p:nvSpPr>
-          <p:cNvPr id="16" name="Text 14"/>
+          <p:cNvPr id="17" name="Text 15"/>
           <p:cNvSpPr txBox="1"/>
           <p:nvPr/>
         </p:nvSpPr>
@@ -7500,7 +7539,7 @@
       </p:sp>
       <p:sp>
         <p:nvSpPr>
-          <p:cNvPr id="17" name="Text 15"/>
+          <p:cNvPr id="18" name="Text 16"/>
           <p:cNvSpPr txBox="1"/>
           <p:nvPr/>
         </p:nvSpPr>
@@ -7531,7 +7570,7 @@
                 <a:ea typeface="Calibri" pitchFamily="34" charset="-122"/>
                 <a:cs typeface="Calibri" pitchFamily="34" charset="-120"/>
               </a:rPr>
-              <a:t>Official stores live; online launch; first sales data</a:t>
+              <a:t>Official stores live as registrations clear; online launch; first sales data</a:t>
             </a:r>
             <a:endParaRPr lang="en-US" sz="1150" dirty="0"/>
           </a:p>
@@ -7539,7 +7578,7 @@
       </p:sp>
       <p:sp>
         <p:nvSpPr>
-          <p:cNvPr id="18" name="Shape 16"/>
+          <p:cNvPr id="19" name="Shape 17"/>
           <p:cNvSpPr/>
           <p:nvPr/>
         </p:nvSpPr>
@@ -7559,7 +7598,7 @@
       </p:sp>
       <p:sp>
         <p:nvSpPr>
-          <p:cNvPr id="19" name="Text 17"/>
+          <p:cNvPr id="20" name="Text 18"/>
           <p:cNvSpPr txBox="1"/>
           <p:nvPr/>
         </p:nvSpPr>
@@ -7598,7 +7637,7 @@
       </p:sp>
       <p:sp>
         <p:nvSpPr>
-          <p:cNvPr id="20" name="Shape 18"/>
+          <p:cNvPr id="21" name="Shape 19"/>
           <p:cNvSpPr/>
           <p:nvPr/>
         </p:nvSpPr>
@@ -7621,7 +7660,7 @@
       </p:sp>
       <p:sp>
         <p:nvSpPr>
-          <p:cNvPr id="21" name="Text 19"/>
+          <p:cNvPr id="22" name="Text 20"/>
           <p:cNvSpPr txBox="1"/>
           <p:nvPr/>
         </p:nvSpPr>
@@ -7660,7 +7699,7 @@
       </p:sp>
       <p:sp>
         <p:nvSpPr>
-          <p:cNvPr id="22" name="Text 20"/>
+          <p:cNvPr id="23" name="Text 21"/>
           <p:cNvSpPr txBox="1"/>
           <p:nvPr/>
         </p:nvSpPr>
@@ -7699,7 +7738,7 @@
       </p:sp>
       <p:sp>
         <p:nvSpPr>
-          <p:cNvPr id="23" name="Shape 21"/>
+          <p:cNvPr id="24" name="Shape 22"/>
           <p:cNvSpPr/>
           <p:nvPr/>
         </p:nvSpPr>
@@ -7719,7 +7758,7 @@
       </p:sp>
       <p:sp>
         <p:nvSpPr>
-          <p:cNvPr id="24" name="Text 22"/>
+          <p:cNvPr id="25" name="Text 23"/>
           <p:cNvSpPr txBox="1"/>
           <p:nvPr/>
         </p:nvSpPr>
@@ -7758,7 +7797,7 @@
       </p:sp>
       <p:sp>
         <p:nvSpPr>
-          <p:cNvPr id="25" name="Text 23"/>
+          <p:cNvPr id="26" name="Text 24"/>
           <p:cNvSpPr txBox="1"/>
           <p:nvPr/>
         </p:nvSpPr>
@@ -7797,7 +7836,7 @@
       </p:sp>
       <p:sp>
         <p:nvSpPr>
-          <p:cNvPr id="26" name="Text 24"/>
+          <p:cNvPr id="27" name="Text 25"/>
           <p:cNvSpPr txBox="1"/>
           <p:nvPr/>
         </p:nvSpPr>
@@ -7836,7 +7875,7 @@
       </p:sp>
       <p:sp>
         <p:nvSpPr>
-          <p:cNvPr id="27" name="Text 25"/>
+          <p:cNvPr id="28" name="Text 26"/>
           <p:cNvSpPr txBox="1"/>
           <p:nvPr/>
         </p:nvSpPr>
@@ -7875,7 +7914,7 @@
       </p:sp>
       <p:sp>
         <p:nvSpPr>
-          <p:cNvPr id="28" name="Text 26"/>
+          <p:cNvPr id="29" name="Text 27"/>
           <p:cNvSpPr txBox="1"/>
           <p:nvPr/>
         </p:nvSpPr>
@@ -7914,7 +7953,7 @@
       </p:sp>
       <p:sp>
         <p:nvSpPr>
-          <p:cNvPr id="29" name="Text 27"/>
+          <p:cNvPr id="30" name="Text 28"/>
           <p:cNvSpPr txBox="1"/>
           <p:nvPr/>
         </p:nvSpPr>
